--- a/_implementation-notes/evening-series/FotH Evening Session 17 Slides DRAFT v1.pptx
+++ b/_implementation-notes/evening-series/FotH Evening Session 17 Slides DRAFT v1.pptx
@@ -10,13 +10,15 @@
   <p:sldIdLst>
     <p:sldId id="256" r:id="rId2"/>
     <p:sldId id="309" r:id="rId210"/>
+    <p:sldId id="541" r:id="rId21"/>
     <p:sldId id="310" r:id="rId211"/>
     <p:sldId id="468" r:id="rId212"/>
     <p:sldId id="469" r:id="rId213"/>
     <p:sldId id="470" r:id="rId214"/>
     <p:sldId id="471" r:id="rId215"/>
     <p:sldId id="472" r:id="rId216"/>
-    <p:sldId id="540" r:id="rId217"/>
+    <p:sldId id="542" r:id="rId22"/>
+    <p:sldId id="543" r:id="rId23"/>
     <p:sldId id="473" r:id="rId218"/>
     <p:sldId id="474" r:id="rId219"/>
     <p:sldId id="312" r:id="rId220"/>
@@ -749,6 +751,214 @@
 </p:notes>
 </file>
 
+<file path=ppt/notesSlides/notesSlide13.xml><?xml version="1.0" encoding="utf-8"?>
+<p:notes xmlns:a="http://schemas.openxmlformats.org/drawingml/2006/main" xmlns:p="http://schemas.openxmlformats.org/presentationml/2006/main" xmlns:r="http://schemas.openxmlformats.org/officeDocument/2006/relationships">
+  <p:cSld>
+    <p:spTree>
+      <p:nvGrpSpPr>
+        <p:cNvPr id="1" name=""/>
+        <p:cNvGrpSpPr/>
+        <p:nvPr/>
+      </p:nvGrpSpPr>
+      <p:grpSpPr>
+        <a:xfrm>
+          <a:off x="0" y="0"/>
+          <a:ext cx="0" cy="0"/>
+          <a:chOff x="0" y="0"/>
+          <a:chExt cx="0" cy="0"/>
+        </a:xfrm>
+      </p:grpSpPr>
+      <p:sp>
+        <p:nvSpPr>
+          <p:cNvPr id="2" name="Notes Placeholder 1"/>
+          <p:cNvSpPr>
+            <a:spLocks noGrp="1"/>
+          </p:cNvSpPr>
+          <p:nvPr>
+            <p:ph type="body" idx="1"/>
+          </p:nvPr>
+        </p:nvSpPr>
+        <p:spPr/>
+        <p:txBody>
+          <a:bodyPr/>
+          <a:lstStyle/>
+          <a:p>
+            <a:r>
+              <a:t>S17 · WELCOME · LEAD: CONTAINER HOLDER · GROUNDING — every session opens on this map</a:t>
+            </a:r>
+          </a:p>
+          <a:p>
+            <a:r>
+              <a:t>BEATS:</a:t>
+            </a:r>
+          </a:p>
+          <a:p>
+            <a:r>
+              <a:t>1. Locate tonight on the map, plainly: Session 17 holds the whole map — all four Connects, wherever the year needs them tonight. Each connection makes the next one real (Matt. 22:37–40).</a:t>
+            </a:r>
+          </a:p>
+          <a:p>
+            <a:r>
+              <a:t>2. The four boxes are one journey — each connection makes the next one real — rooted in the two great commandments: love God, love neighbor (Matt 22:37–40).</a:t>
+            </a:r>
+          </a:p>
+          <a:p>
+            <a:r>
+              <a:t>3. This is also the 'where we are on the map' minute the welcome owes any newcomer.</a:t>
+            </a:r>
+          </a:p>
+          <a:p>
+            <a:r>
+              <a:t>CUES: Two minutes at most; then tonight's road.</a:t>
+            </a:r>
+          </a:p>
+        </p:txBody>
+      </p:sp>
+    </p:spTree>
+  </p:cSld>
+  <p:clrMapOvr>
+    <a:masterClrMapping/>
+  </p:clrMapOvr>
+</p:notes>
+</file>
+
+<file path=ppt/notesSlides/notesSlide14.xml><?xml version="1.0" encoding="utf-8"?>
+<p:notes xmlns:a="http://schemas.openxmlformats.org/drawingml/2006/main" xmlns:p="http://schemas.openxmlformats.org/presentationml/2006/main" xmlns:r="http://schemas.openxmlformats.org/officeDocument/2006/relationships">
+  <p:cSld>
+    <p:spTree>
+      <p:nvGrpSpPr>
+        <p:cNvPr id="1" name=""/>
+        <p:cNvGrpSpPr/>
+        <p:nvPr/>
+      </p:nvGrpSpPr>
+      <p:grpSpPr>
+        <a:xfrm>
+          <a:off x="0" y="0"/>
+          <a:ext cx="0" cy="0"/>
+          <a:chOff x="0" y="0"/>
+          <a:chExt cx="0" cy="0"/>
+        </a:xfrm>
+      </p:grpSpPr>
+      <p:sp>
+        <p:nvSpPr>
+          <p:cNvPr id="2" name="Notes Placeholder 1"/>
+          <p:cNvSpPr>
+            <a:spLocks noGrp="1"/>
+          </p:cNvSpPr>
+          <p:nvPr>
+            <p:ph type="body" idx="1"/>
+          </p:nvPr>
+        </p:nvSpPr>
+        <p:spPr/>
+        <p:txBody>
+          <a:bodyPr/>
+          <a:lstStyle/>
+          <a:p>
+            <a:r>
+              <a:t>S17 · COMMISSIONING · LEAD: CONTENT PRESENTER</a:t>
+            </a:r>
+          </a:p>
+          <a:p>
+            <a:r>
+              <a:t>BEATS:</a:t>
+            </a:r>
+          </a:p>
+          <a:p>
+            <a:r>
+              <a:t>1. The sheet on the screen is the sheet in their hands — walk it, don't read it.</a:t>
+            </a:r>
+          </a:p>
+          <a:p>
+            <a:r>
+              <a:t>2. The standing rhythm first: the morning question, the evening journal line — one box per day on the week-grids.</a:t>
+            </a:r>
+          </a:p>
+          <a:p>
+            <a:r>
+              <a:t>3. A missed box is never a failure — it is an invitation to return.</a:t>
+            </a:r>
+          </a:p>
+          <a:p>
+            <a:r>
+              <a:t>CUES: The four parts are the next slide.</a:t>
+            </a:r>
+          </a:p>
+        </p:txBody>
+      </p:sp>
+    </p:spTree>
+  </p:cSld>
+  <p:clrMapOvr>
+    <a:masterClrMapping/>
+  </p:clrMapOvr>
+</p:notes>
+</file>
+
+<file path=ppt/notesSlides/notesSlide15.xml><?xml version="1.0" encoding="utf-8"?>
+<p:notes xmlns:a="http://schemas.openxmlformats.org/drawingml/2006/main" xmlns:p="http://schemas.openxmlformats.org/presentationml/2006/main" xmlns:r="http://schemas.openxmlformats.org/officeDocument/2006/relationships">
+  <p:cSld>
+    <p:spTree>
+      <p:nvGrpSpPr>
+        <p:cNvPr id="1" name=""/>
+        <p:cNvGrpSpPr/>
+        <p:nvPr/>
+      </p:nvGrpSpPr>
+      <p:grpSpPr>
+        <a:xfrm>
+          <a:off x="0" y="0"/>
+          <a:ext cx="0" cy="0"/>
+          <a:chOff x="0" y="0"/>
+          <a:chExt cx="0" cy="0"/>
+        </a:xfrm>
+      </p:grpSpPr>
+      <p:sp>
+        <p:nvSpPr>
+          <p:cNvPr id="2" name="Notes Placeholder 1"/>
+          <p:cNvSpPr>
+            <a:spLocks noGrp="1"/>
+          </p:cNvSpPr>
+          <p:nvPr>
+            <p:ph type="body" idx="1"/>
+          </p:nvPr>
+        </p:nvSpPr>
+        <p:spPr/>
+        <p:txBody>
+          <a:bodyPr/>
+          <a:lstStyle/>
+          <a:p>
+            <a:r>
+              <a:t>S17 · COMMISSIONING · LEAD: CONTENT PRESENTER</a:t>
+            </a:r>
+          </a:p>
+          <a:p>
+            <a:r>
+              <a:t>BEATS:</a:t>
+            </a:r>
+          </a:p>
+          <a:p>
+            <a:r>
+              <a:t>1. The four parts, in order: the homework practice, week one; the end-of-week-one check-in; the homework practice, week two; one sentence of preparation.</a:t>
+            </a:r>
+          </a:p>
+          <a:p>
+            <a:r>
+              <a:t>2. Check-in partners are named aloud before leaving this slide — the sheet has the line to write the name.</a:t>
+            </a:r>
+          </a:p>
+          <a:p>
+            <a:r>
+              <a:t>GUARD: The sheet-walk, not a re-teach.</a:t>
+            </a:r>
+          </a:p>
+        </p:txBody>
+      </p:sp>
+    </p:spTree>
+  </p:cSld>
+  <p:clrMapOvr>
+    <a:masterClrMapping/>
+  </p:clrMapOvr>
+</p:notes>
+</file>
+
 <file path=ppt/notesSlides/notesSlide207.xml><?xml version="1.0" encoding="utf-8"?>
 <p:notes xmlns:a="http://schemas.openxmlformats.org/drawingml/2006/main" xmlns:r="http://schemas.openxmlformats.org/officeDocument/2006/relationships" xmlns:p="http://schemas.openxmlformats.org/presentationml/2006/main">
   <p:cSld>
@@ -888,20 +1098,22 @@
           <a:lstStyle/>
           <a:p>
             <a:r>
-              <a:rPr lang="en-US" sz="1200"/>
               <a:t>S17 · 7:00–8:30 · LEAD: BOTH LEADERS · MODE A — THE LIFTED SESSION</a:t>
             </a:r>
           </a:p>
           <a:p>
             <a:r>
-              <a:rPr lang="en-US" sz="1200"/>
               <a:t>BEATS: 1. Bless, then say the reframe once, warmly: we lost [date] to [cause]; this afternoon exists in the calendar for exactly this — today IS [session name], whole, not a make-up. Nothing was skipped; it just moved. 2. At 4:20 hand the room to the lifted plan — its blocks, scripts, splits, and watch-fors run from its own run sheet, prepped via the lift checklist at the prep meeting. 3. Today's constants resume at 5:13: the break practice, the feedback round, the close.</a:t>
             </a:r>
           </a:p>
           <a:p>
             <a:r>
-              <a:rPr lang="en-US" sz="1200"/>
               <a:t>GUARD: Trim the lifted plan's closing, never its center. If the lifted session is teen-led, its leadership spec applies, re-rehearsed. Its crisis contingencies travel with it — re-read at prep.</a:t>
+            </a:r>
+          </a:p>
+          <a:p>
+            <a:r>
+              <a:t>PAIR LEAD: name the leading pair in the welcome — two leaders hold tonight, and the room will see the evening handed back and forth between them; that is the design. The pair practices the session together beforehand.</a:t>
             </a:r>
           </a:p>
         </p:txBody>
@@ -1144,59 +1356,6 @@
             <a:r>
               <a:rPr lang="en-US" sz="1200"/>
               <a:t>GUARD: Never minimize the break from the front — 'see you in a couple weeks' is how practices die. The Returning Rule travels: begin again on the next available day.</a:t>
-            </a:r>
-          </a:p>
-        </p:txBody>
-      </p:sp>
-    </p:spTree>
-  </p:cSld>
-  <p:clrMapOvr>
-    <a:masterClrMapping/>
-  </p:clrMapOvr>
-</p:notes>
-</file>
-
-<file path=ppt/notesSlides/notesSlide214.xml><?xml version="1.0" encoding="utf-8"?>
-<p:notes xmlns:a="http://schemas.openxmlformats.org/drawingml/2006/main" xmlns:r="http://schemas.openxmlformats.org/officeDocument/2006/relationships" xmlns:p="http://schemas.openxmlformats.org/presentationml/2006/main">
-  <p:cSld>
-    <p:spTree>
-      <p:nvGrpSpPr>
-        <p:cNvPr id="1" name=""/>
-        <p:cNvGrpSpPr/>
-        <p:nvPr/>
-      </p:nvGrpSpPr>
-      <p:grpSpPr>
-        <a:xfrm>
-          <a:off x="0" y="0"/>
-          <a:ext cx="0" cy="0"/>
-          <a:chOff x="0" y="0"/>
-          <a:chExt cx="0" cy="0"/>
-        </a:xfrm>
-      </p:grpSpPr>
-      <p:sp>
-        <p:nvSpPr>
-          <p:cNvPr id="2" name="Notes Placeholder 1"/>
-          <p:cNvSpPr>
-            <a:spLocks noGrp="1"/>
-          </p:cNvSpPr>
-          <p:nvPr>
-            <p:ph type="body" idx="1"/>
-          </p:nvPr>
-        </p:nvSpPr>
-        <p:spPr/>
-        <p:txBody>
-          <a:bodyPr/>
-          <a:lstStyle/>
-          <a:p>
-            <a:r>
-              <a:rPr lang="en-US" sz="1200"/>
-              <a:t>S17 · closing, timed at the lab (B / A) · EITHER MODE</a:t>
-            </a:r>
-          </a:p>
-          <a:p>
-            <a:r>
-              <a:rPr lang="en-US" sz="1200"/>
-              <a:t>BEATS: 1. One row on the card: your one break practice, the one written in your journal — daily row if daily, weekly box if weekly. 2. Everything else rests on purpose — a card suspended on purpose beats a card half-kept in guilt. 3. A missed box is never failure — begin again on the next available day; see you at The Return II.</a:t>
             </a:r>
           </a:p>
         </p:txBody>
@@ -4573,7 +4732,1512 @@
 </p:sld>
 </file>
 
-<file path=ppt/slides/slide209.xml><?xml version="1.0" encoding="utf-8"?>
+<file path=ppt/slides/slide10.xml><?xml version="1.0" encoding="utf-8"?>
+<p:sld xmlns:a="http://schemas.openxmlformats.org/drawingml/2006/main" xmlns:r="http://schemas.openxmlformats.org/officeDocument/2006/relationships" xmlns:p="http://schemas.openxmlformats.org/presentationml/2006/main">
+  <p:cSld>
+    <p:spTree>
+      <p:nvGrpSpPr>
+        <p:cNvPr id="1" name=""/>
+        <p:cNvGrpSpPr/>
+        <p:nvPr/>
+      </p:nvGrpSpPr>
+      <p:grpSpPr>
+        <a:xfrm>
+          <a:off x="0" y="0"/>
+          <a:ext cx="0" cy="0"/>
+          <a:chOff x="0" y="0"/>
+          <a:chExt cx="0" cy="0"/>
+        </a:xfrm>
+      </p:grpSpPr>
+      <p:sp>
+        <p:nvSpPr>
+          <p:cNvPr id="2" name="Rectangle 1"/>
+          <p:cNvSpPr/>
+          <p:nvPr/>
+        </p:nvSpPr>
+        <p:spPr>
+          <a:xfrm>
+            <a:off x="0" y="0"/>
+            <a:ext cx="12191695" cy="6858000"/>
+          </a:xfrm>
+          <a:prstGeom prst="rect">
+            <a:avLst/>
+          </a:prstGeom>
+          <a:solidFill>
+            <a:srgbClr val="FFFFFF"/>
+          </a:solidFill>
+          <a:ln>
+            <a:noFill/>
+          </a:ln>
+        </p:spPr>
+        <p:txBody>
+          <a:bodyPr/>
+          <a:lstStyle/>
+          <a:p>
+            <a:endParaRPr/>
+          </a:p>
+        </p:txBody>
+      </p:sp>
+      <p:sp>
+        <p:nvSpPr>
+          <p:cNvPr id="3" name="TextBox 2"/>
+          <p:cNvSpPr txBox="1"/>
+          <p:nvPr/>
+        </p:nvSpPr>
+        <p:spPr>
+          <a:xfrm>
+            <a:off x="822960" y="502920"/>
+            <a:ext cx="10515600" cy="822960"/>
+          </a:xfrm>
+          <a:prstGeom prst="rect">
+            <a:avLst/>
+          </a:prstGeom>
+          <a:noFill/>
+        </p:spPr>
+        <p:txBody>
+          <a:bodyPr wrap="square">
+            <a:spAutoFit/>
+          </a:bodyPr>
+          <a:lstStyle/>
+          <a:p>
+            <a:pPr algn="l">
+              <a:spcAft>
+                <a:spcPts val="600"/>
+              </a:spcAft>
+            </a:pPr>
+            <a:r>
+              <a:rPr sz="2800" b="1" i="0">
+                <a:solidFill>
+                  <a:srgbClr val="2C5F2D"/>
+                </a:solidFill>
+                <a:latin typeface="Cambria"/>
+              </a:rPr>
+              <a:t>The Leader Feedback Round</a:t>
+            </a:r>
+          </a:p>
+        </p:txBody>
+      </p:sp>
+      <p:sp>
+        <p:nvSpPr>
+          <p:cNvPr id="4" name="TextBox 4"/>
+          <p:cNvSpPr txBox="1"/>
+          <p:nvPr/>
+        </p:nvSpPr>
+        <p:spPr>
+          <a:xfrm>
+            <a:off x="822960" y="1554480"/>
+            <a:ext cx="6675120" cy="4892040"/>
+          </a:xfrm>
+          <a:prstGeom prst="rect">
+            <a:avLst/>
+          </a:prstGeom>
+          <a:noFill/>
+        </p:spPr>
+        <p:txBody>
+          <a:bodyPr wrap="square" lIns="91440" tIns="91440" rIns="91440" bIns="91440"/>
+          <a:lstStyle/>
+          <a:p>
+            <a:pPr marL="274320" indent="-274320">
+              <a:spcAft>
+                <a:spcPts val="900"/>
+              </a:spcAft>
+            </a:pPr>
+            <a:r>
+              <a:rPr sz="2800" b="1" i="0">
+                <a:solidFill>
+                  <a:srgbClr val="97BC62"/>
+                </a:solidFill>
+                <a:latin typeface="Calibri"/>
+              </a:rPr>
+              <a:t>•  </a:t>
+            </a:r>
+            <a:r>
+              <a:rPr sz="2800" b="0" i="0">
+                <a:solidFill>
+                  <a:srgbClr val="222B22"/>
+                </a:solidFill>
+                <a:latin typeface="Calibri"/>
+              </a:rPr>
+              <a:t>Two rounds, same as every session — the container holder first, then the content presenter: three things each</a:t>
+            </a:r>
+          </a:p>
+          <a:p>
+            <a:pPr marL="685800" indent="-274320">
+              <a:spcAft>
+                <a:spcPts val="700"/>
+              </a:spcAft>
+            </a:pPr>
+            <a:r>
+              <a:rPr sz="2000" b="1" i="0">
+                <a:solidFill>
+                  <a:srgbClr val="97BC62"/>
+                </a:solidFill>
+                <a:latin typeface="Calibri"/>
+              </a:rPr>
+              <a:t>–  </a:t>
+            </a:r>
+            <a:r>
+              <a:rPr sz="2000" b="0" i="1">
+                <a:solidFill>
+                  <a:srgbClr val="222B22"/>
+                </a:solidFill>
+                <a:latin typeface="Calibri"/>
+              </a:rPr>
+              <a:t>“What I think went well tonight: ______”</a:t>
+            </a:r>
+          </a:p>
+          <a:p>
+            <a:pPr marL="685800" indent="-274320">
+              <a:spcAft>
+                <a:spcPts val="700"/>
+              </a:spcAft>
+            </a:pPr>
+            <a:r>
+              <a:rPr sz="2000" b="1" i="0">
+                <a:solidFill>
+                  <a:srgbClr val="97BC62"/>
+                </a:solidFill>
+                <a:latin typeface="Calibri"/>
+              </a:rPr>
+              <a:t>–  </a:t>
+            </a:r>
+            <a:r>
+              <a:rPr sz="2000" b="0" i="1">
+                <a:solidFill>
+                  <a:srgbClr val="222B22"/>
+                </a:solidFill>
+                <a:latin typeface="Calibri"/>
+              </a:rPr>
+              <a:t>“What I’d do differently next time: ______”</a:t>
+            </a:r>
+          </a:p>
+          <a:p>
+            <a:pPr marL="685800" indent="-274320">
+              <a:spcAft>
+                <a:spcPts val="700"/>
+              </a:spcAft>
+            </a:pPr>
+            <a:r>
+              <a:rPr sz="2000" b="1" i="0">
+                <a:solidFill>
+                  <a:srgbClr val="97BC62"/>
+                </a:solidFill>
+                <a:latin typeface="Calibri"/>
+              </a:rPr>
+              <a:t>–  </a:t>
+            </a:r>
+            <a:r>
+              <a:rPr sz="2000" b="0" i="1">
+                <a:solidFill>
+                  <a:srgbClr val="222B22"/>
+                </a:solidFill>
+                <a:latin typeface="Calibri"/>
+              </a:rPr>
+              <a:t>“If I were to teach tonight’s process to someone, I would tell them: ______”</a:t>
+            </a:r>
+          </a:p>
+          <a:p>
+            <a:pPr marL="274320" indent="-274320">
+              <a:spcAft>
+                <a:spcPts val="900"/>
+              </a:spcAft>
+            </a:pPr>
+            <a:r>
+              <a:rPr sz="2800" b="1" i="0">
+                <a:solidFill>
+                  <a:srgbClr val="97BC62"/>
+                </a:solidFill>
+                <a:latin typeface="Calibri"/>
+              </a:rPr>
+              <a:t>•  </a:t>
+            </a:r>
+            <a:r>
+              <a:rPr sz="2800" b="0" i="0">
+                <a:solidFill>
+                  <a:srgbClr val="222B22"/>
+                </a:solidFill>
+                <a:latin typeface="Calibri"/>
+              </a:rPr>
+              <a:t>Then the room — the same two questions about tonight</a:t>
+            </a:r>
+          </a:p>
+          <a:p>
+            <a:pPr marL="274320" indent="-274320">
+              <a:spcAft>
+                <a:spcPts val="900"/>
+              </a:spcAft>
+            </a:pPr>
+            <a:r>
+              <a:rPr sz="2800" b="1" i="0">
+                <a:solidFill>
+                  <a:srgbClr val="97BC62"/>
+                </a:solidFill>
+                <a:latin typeface="Calibri"/>
+              </a:rPr>
+              <a:t>•  </a:t>
+            </a:r>
+            <a:r>
+              <a:rPr sz="2800" b="0" i="0">
+                <a:solidFill>
+                  <a:srgbClr val="222B22"/>
+                </a:solidFill>
+                <a:latin typeface="Calibri"/>
+              </a:rPr>
+              <a:t>The leaders receive without defending — “thank you” is the whole response</a:t>
+            </a:r>
+          </a:p>
+        </p:txBody>
+      </p:sp>
+      <p:sp>
+        <p:nvSpPr>
+          <p:cNvPr id="90" name="SlideNum"/>
+          <p:cNvSpPr txBox="1"/>
+          <p:nvPr/>
+        </p:nvSpPr>
+        <p:spPr>
+          <a:xfrm>
+            <a:off x="11384280" y="6446520"/>
+            <a:ext cx="640080" cy="292608"/>
+          </a:xfrm>
+          <a:prstGeom prst="rect">
+            <a:avLst/>
+          </a:prstGeom>
+          <a:noFill/>
+        </p:spPr>
+        <p:txBody>
+          <a:bodyPr wrap="none" lIns="0" tIns="0" rIns="45720" bIns="0" anchor="ctr"/>
+          <a:lstStyle/>
+          <a:p>
+            <a:pPr algn="r"/>
+            <a:r>
+              <a:t>217</a:t>
+            </a:r>
+            <a:endParaRPr sz="1000" b="1">
+              <a:solidFill>
+                <a:srgbClr val="7A8A6E"/>
+              </a:solidFill>
+              <a:latin typeface="Calibri"/>
+            </a:endParaRPr>
+          </a:p>
+        </p:txBody>
+      </p:sp>
+      <p:pic>
+        <p:nvPicPr>
+          <p:cNvPr id="33" name="Picture 33" descr="compass on the trail - the weekly bearing check"/>
+          <p:cNvPicPr>
+            <a:picLocks noChangeAspect="1"/>
+          </p:cNvPicPr>
+          <p:nvPr/>
+        </p:nvPicPr>
+        <p:blipFill>
+          <a:blip r:embed="rId3"/>
+          <a:stretch>
+            <a:fillRect/>
+          </a:stretch>
+        </p:blipFill>
+        <p:spPr>
+          <a:xfrm>
+            <a:off x="8106160" y="1463040"/>
+            <a:ext cx="3259831" cy="4892040"/>
+          </a:xfrm>
+          <a:prstGeom prst="rect">
+            <a:avLst/>
+          </a:prstGeom>
+          <a:ln w="76200">
+            <a:solidFill>
+              <a:srgbClr val="FFFFFF"/>
+            </a:solidFill>
+          </a:ln>
+          <a:effectLst>
+            <a:outerShdw blurRad="63500" dist="25400" dir="5400000" rotWithShape="0">
+              <a:srgbClr val="000000">
+                <a:alpha val="35000"/>
+              </a:srgbClr>
+            </a:outerShdw>
+          </a:effectLst>
+        </p:spPr>
+      </p:pic>
+    </p:spTree>
+  </p:cSld>
+  <p:clrMapOvr>
+    <a:masterClrMapping/>
+  </p:clrMapOvr>
+</p:sld>
+</file>
+
+<file path=ppt/slides/slide11.xml><?xml version="1.0" encoding="utf-8"?>
+<p:sld xmlns:a="http://schemas.openxmlformats.org/drawingml/2006/main" xmlns:r="http://schemas.openxmlformats.org/officeDocument/2006/relationships" xmlns:p="http://schemas.openxmlformats.org/presentationml/2006/main">
+  <p:cSld>
+    <p:spTree>
+      <p:nvGrpSpPr>
+        <p:cNvPr id="1" name=""/>
+        <p:cNvGrpSpPr/>
+        <p:nvPr/>
+      </p:nvGrpSpPr>
+      <p:grpSpPr>
+        <a:xfrm>
+          <a:off x="0" y="0"/>
+          <a:ext cx="0" cy="0"/>
+          <a:chOff x="0" y="0"/>
+          <a:chExt cx="0" cy="0"/>
+        </a:xfrm>
+      </p:grpSpPr>
+      <p:sp>
+        <p:nvSpPr>
+          <p:cNvPr id="2" name="Rectangle 1"/>
+          <p:cNvSpPr/>
+          <p:nvPr/>
+        </p:nvSpPr>
+        <p:spPr>
+          <a:xfrm>
+            <a:off x="0" y="0"/>
+            <a:ext cx="12191695" cy="6858000"/>
+          </a:xfrm>
+          <a:prstGeom prst="rect">
+            <a:avLst/>
+          </a:prstGeom>
+          <a:solidFill>
+            <a:srgbClr val="FFFFFF"/>
+          </a:solidFill>
+          <a:ln>
+            <a:noFill/>
+          </a:ln>
+        </p:spPr>
+        <p:txBody>
+          <a:bodyPr/>
+          <a:lstStyle/>
+          <a:p>
+            <a:endParaRPr/>
+          </a:p>
+        </p:txBody>
+      </p:sp>
+      <p:sp>
+        <p:nvSpPr>
+          <p:cNvPr id="3" name="TextBox 2"/>
+          <p:cNvSpPr txBox="1"/>
+          <p:nvPr/>
+        </p:nvSpPr>
+        <p:spPr>
+          <a:xfrm>
+            <a:off x="822960" y="502920"/>
+            <a:ext cx="10515600" cy="822960"/>
+          </a:xfrm>
+          <a:prstGeom prst="rect">
+            <a:avLst/>
+          </a:prstGeom>
+          <a:noFill/>
+        </p:spPr>
+        <p:txBody>
+          <a:bodyPr wrap="square">
+            <a:spAutoFit/>
+          </a:bodyPr>
+          <a:lstStyle/>
+          <a:p>
+            <a:pPr algn="l">
+              <a:spcAft>
+                <a:spcPts val="600"/>
+              </a:spcAft>
+            </a:pPr>
+            <a:r>
+              <a:rPr sz="2800" b="1" i="0">
+                <a:solidFill>
+                  <a:srgbClr val="2C5F2D"/>
+                </a:solidFill>
+                <a:latin typeface="Cambria"/>
+              </a:rPr>
+              <a:t>Closing the Container + Aaronic Blessing</a:t>
+            </a:r>
+          </a:p>
+        </p:txBody>
+      </p:sp>
+      <p:sp>
+        <p:nvSpPr>
+          <p:cNvPr id="4" name="TextBox 4"/>
+          <p:cNvSpPr txBox="1"/>
+          <p:nvPr/>
+        </p:nvSpPr>
+        <p:spPr>
+          <a:xfrm>
+            <a:off x="822960" y="1600200"/>
+            <a:ext cx="5669280" cy="4572000"/>
+          </a:xfrm>
+          <a:prstGeom prst="rect">
+            <a:avLst/>
+          </a:prstGeom>
+          <a:noFill/>
+        </p:spPr>
+        <p:txBody>
+          <a:bodyPr wrap="square" lIns="91440" tIns="91440" rIns="91440" bIns="91440"/>
+          <a:lstStyle/>
+          <a:p>
+            <a:pPr marL="274320" indent="-274320">
+              <a:spcAft>
+                <a:spcPts val="900"/>
+              </a:spcAft>
+            </a:pPr>
+            <a:r>
+              <a:rPr sz="2200" b="1" i="0">
+                <a:solidFill>
+                  <a:srgbClr val="97BC62"/>
+                </a:solidFill>
+                <a:latin typeface="Calibri"/>
+              </a:rPr>
+              <a:t>•  </a:t>
+            </a:r>
+            <a:r>
+              <a:rPr sz="2200" b="0" i="0">
+                <a:solidFill>
+                  <a:srgbClr val="222B22"/>
+                </a:solidFill>
+                <a:latin typeface="Calibri"/>
+              </a:rPr>
+              <a:t>We close the way we opened — the container, six steps:</a:t>
+            </a:r>
+          </a:p>
+          <a:p>
+            <a:pPr marL="685800" indent="-274320">
+              <a:spcAft>
+                <a:spcPts val="700"/>
+              </a:spcAft>
+            </a:pPr>
+            <a:r>
+              <a:rPr sz="2000" b="1" i="0">
+                <a:solidFill>
+                  <a:srgbClr val="97BC62"/>
+                </a:solidFill>
+                <a:latin typeface="Calibri"/>
+              </a:rPr>
+              <a:t>1   </a:t>
+            </a:r>
+            <a:r>
+              <a:rPr sz="2000" b="0" i="0">
+                <a:solidFill>
+                  <a:srgbClr val="222B22"/>
+                </a:solidFill>
+                <a:latin typeface="Calibri"/>
+              </a:rPr>
+              <a:t>Stand again — same circle, same posture as the open</a:t>
+            </a:r>
+          </a:p>
+          <a:p>
+            <a:pPr marL="685800" indent="-274320">
+              <a:spcAft>
+                <a:spcPts val="700"/>
+              </a:spcAft>
+            </a:pPr>
+            <a:r>
+              <a:rPr sz="2000" b="1" i="0">
+                <a:solidFill>
+                  <a:srgbClr val="97BC62"/>
+                </a:solidFill>
+                <a:latin typeface="Calibri"/>
+              </a:rPr>
+              <a:t>2   </a:t>
+            </a:r>
+            <a:r>
+              <a:rPr sz="2000" b="0" i="0">
+                <a:solidFill>
+                  <a:srgbClr val="222B22"/>
+                </a:solidFill>
+                <a:latin typeface="Calibri"/>
+              </a:rPr>
+              <a:t>One-word landing — compare it to your opening word</a:t>
+            </a:r>
+          </a:p>
+          <a:p>
+            <a:pPr marL="685800" indent="-274320">
+              <a:spcAft>
+                <a:spcPts val="700"/>
+              </a:spcAft>
+            </a:pPr>
+            <a:r>
+              <a:rPr sz="2000" b="1" i="0">
+                <a:solidFill>
+                  <a:srgbClr val="97BC62"/>
+                </a:solidFill>
+                <a:latin typeface="Calibri"/>
+              </a:rPr>
+              <a:t>3   </a:t>
+            </a:r>
+            <a:r>
+              <a:rPr sz="2000" b="0" i="0">
+                <a:solidFill>
+                  <a:srgbClr val="222B22"/>
+                </a:solidFill>
+                <a:latin typeface="Calibri"/>
+              </a:rPr>
+              <a:t>The one thing you are taking from tonight</a:t>
+            </a:r>
+          </a:p>
+          <a:p>
+            <a:pPr marL="685800" indent="-274320">
+              <a:spcAft>
+                <a:spcPts val="700"/>
+              </a:spcAft>
+            </a:pPr>
+            <a:r>
+              <a:rPr sz="2000" b="1" i="0">
+                <a:solidFill>
+                  <a:srgbClr val="97BC62"/>
+                </a:solidFill>
+                <a:latin typeface="Calibri"/>
+              </a:rPr>
+              <a:t>4   </a:t>
+            </a:r>
+            <a:r>
+              <a:rPr sz="2000" b="0" i="0">
+                <a:solidFill>
+                  <a:srgbClr val="222B22"/>
+                </a:solidFill>
+                <a:latin typeface="Calibri"/>
+              </a:rPr>
+              <a:t>The one practice — committed aloud, or modified to one you will actually keep</a:t>
+            </a:r>
+          </a:p>
+          <a:p>
+            <a:pPr marL="685800" indent="-274320">
+              <a:spcAft>
+                <a:spcPts val="700"/>
+              </a:spcAft>
+            </a:pPr>
+            <a:r>
+              <a:rPr sz="2000" b="1" i="0">
+                <a:solidFill>
+                  <a:srgbClr val="97BC62"/>
+                </a:solidFill>
+                <a:latin typeface="Calibri"/>
+              </a:rPr>
+              <a:t>5   </a:t>
+            </a:r>
+            <a:r>
+              <a:rPr sz="2000" b="0" i="0">
+                <a:solidFill>
+                  <a:srgbClr val="222B22"/>
+                </a:solidFill>
+                <a:latin typeface="Calibri"/>
+              </a:rPr>
+              <a:t>Blessings — specific, witnessed, short</a:t>
+            </a:r>
+          </a:p>
+          <a:p>
+            <a:pPr marL="685800" indent="-274320">
+              <a:spcAft>
+                <a:spcPts val="700"/>
+              </a:spcAft>
+            </a:pPr>
+            <a:r>
+              <a:rPr sz="2000" b="1" i="0">
+                <a:solidFill>
+                  <a:srgbClr val="97BC62"/>
+                </a:solidFill>
+                <a:latin typeface="Calibri"/>
+              </a:rPr>
+              <a:t>6   </a:t>
+            </a:r>
+            <a:r>
+              <a:rPr sz="2000" b="0" i="0">
+                <a:solidFill>
+                  <a:srgbClr val="222B22"/>
+                </a:solidFill>
+                <a:latin typeface="Calibri"/>
+              </a:rPr>
+              <a:t>Closing prayer — and the Aaronic blessing, spoken over each other, face to face</a:t>
+            </a:r>
+          </a:p>
+        </p:txBody>
+      </p:sp>
+      <p:sp>
+        <p:nvSpPr>
+          <p:cNvPr id="6" name="TextBox 6"/>
+          <p:cNvSpPr txBox="1"/>
+          <p:nvPr/>
+        </p:nvSpPr>
+        <p:spPr>
+          <a:xfrm>
+            <a:off x="6766560" y="1737360"/>
+            <a:ext cx="4663440" cy="2926080"/>
+          </a:xfrm>
+          <a:prstGeom prst="rect">
+            <a:avLst/>
+          </a:prstGeom>
+          <a:solidFill>
+            <a:srgbClr val="F1F6EC"/>
+          </a:solidFill>
+        </p:spPr>
+        <p:txBody>
+          <a:bodyPr wrap="square" lIns="91440" tIns="91440" rIns="91440" bIns="91440" anchor="ctr"/>
+          <a:lstStyle/>
+          <a:p>
+            <a:pPr>
+              <a:spcAft>
+                <a:spcPts val="900"/>
+              </a:spcAft>
+            </a:pPr>
+            <a:r>
+              <a:rPr sz="1200" b="1" i="0">
+                <a:solidFill>
+                  <a:srgbClr val="97BC62"/>
+                </a:solidFill>
+                <a:latin typeface="Calibri"/>
+              </a:rPr>
+              <a:t>THE AARONIC BLESSING — NUMBERS 6:24–26</a:t>
+            </a:r>
+          </a:p>
+          <a:p>
+            <a:pPr>
+              <a:spcAft>
+                <a:spcPts val="600"/>
+              </a:spcAft>
+            </a:pPr>
+            <a:r>
+              <a:rPr sz="2400" b="0" i="1">
+                <a:solidFill>
+                  <a:srgbClr val="222B22"/>
+                </a:solidFill>
+                <a:latin typeface="Cambria"/>
+              </a:rPr>
+              <a:t>“The Lord bless you and keep you;</a:t>
+            </a:r>
+          </a:p>
+          <a:p>
+            <a:pPr>
+              <a:spcAft>
+                <a:spcPts val="600"/>
+              </a:spcAft>
+            </a:pPr>
+            <a:r>
+              <a:rPr sz="2400" b="0" i="1">
+                <a:solidFill>
+                  <a:srgbClr val="222B22"/>
+                </a:solidFill>
+                <a:latin typeface="Cambria"/>
+              </a:rPr>
+              <a:t>the Lord make his face to shine upon you, and be gracious to you;</a:t>
+            </a:r>
+          </a:p>
+          <a:p>
+            <a:pPr>
+              <a:spcAft>
+                <a:spcPts val="600"/>
+              </a:spcAft>
+            </a:pPr>
+            <a:r>
+              <a:rPr sz="2400" b="0" i="1">
+                <a:solidFill>
+                  <a:srgbClr val="222B22"/>
+                </a:solidFill>
+                <a:latin typeface="Cambria"/>
+              </a:rPr>
+              <a:t>the Lord lift up his countenance upon you, and give you peace.”</a:t>
+            </a:r>
+          </a:p>
+        </p:txBody>
+      </p:sp>
+      <p:sp>
+        <p:nvSpPr>
+          <p:cNvPr id="90" name="SlideNum"/>
+          <p:cNvSpPr txBox="1"/>
+          <p:nvPr/>
+        </p:nvSpPr>
+        <p:spPr>
+          <a:xfrm>
+            <a:off x="11384280" y="6446520"/>
+            <a:ext cx="640080" cy="292608"/>
+          </a:xfrm>
+          <a:prstGeom prst="rect">
+            <a:avLst/>
+          </a:prstGeom>
+          <a:noFill/>
+        </p:spPr>
+        <p:txBody>
+          <a:bodyPr wrap="none" lIns="0" tIns="0" rIns="45720" bIns="0" anchor="ctr"/>
+          <a:lstStyle/>
+          <a:p>
+            <a:pPr algn="r"/>
+            <a:r>
+              <a:t>218</a:t>
+            </a:r>
+            <a:endParaRPr sz="1000" b="1">
+              <a:solidFill>
+                <a:srgbClr val="7A8A6E"/>
+              </a:solidFill>
+              <a:latin typeface="Calibri"/>
+            </a:endParaRPr>
+          </a:p>
+        </p:txBody>
+      </p:sp>
+    </p:spTree>
+  </p:cSld>
+  <p:clrMapOvr>
+    <a:masterClrMapping/>
+  </p:clrMapOvr>
+</p:sld>
+</file>
+
+<file path=ppt/slides/slide12.xml><?xml version="1.0" encoding="utf-8"?>
+<p:sld xmlns:a="http://schemas.openxmlformats.org/drawingml/2006/main" xmlns:r="http://schemas.openxmlformats.org/officeDocument/2006/relationships" xmlns:p="http://schemas.openxmlformats.org/presentationml/2006/main">
+  <p:cSld>
+    <p:spTree>
+      <p:nvGrpSpPr>
+        <p:cNvPr id="1" name=""/>
+        <p:cNvGrpSpPr/>
+        <p:nvPr/>
+      </p:nvGrpSpPr>
+      <p:grpSpPr>
+        <a:xfrm>
+          <a:off x="0" y="0"/>
+          <a:ext cx="0" cy="0"/>
+          <a:chOff x="0" y="0"/>
+          <a:chExt cx="0" cy="0"/>
+        </a:xfrm>
+      </p:grpSpPr>
+      <p:sp>
+        <p:nvSpPr>
+          <p:cNvPr id="2" name="Rectangle 1"/>
+          <p:cNvSpPr/>
+          <p:nvPr/>
+        </p:nvSpPr>
+        <p:spPr>
+          <a:xfrm>
+            <a:off x="0" y="0"/>
+            <a:ext cx="12191695" cy="6858000"/>
+          </a:xfrm>
+          <a:prstGeom prst="rect">
+            <a:avLst/>
+          </a:prstGeom>
+          <a:solidFill>
+            <a:srgbClr val="2C5F2D"/>
+          </a:solidFill>
+          <a:ln>
+            <a:noFill/>
+          </a:ln>
+          <a:effectLst/>
+        </p:spPr>
+        <p:style>
+          <a:lnRef idx="1">
+            <a:schemeClr val="accent1"/>
+          </a:lnRef>
+          <a:fillRef idx="3">
+            <a:schemeClr val="accent1"/>
+          </a:fillRef>
+          <a:effectRef idx="2">
+            <a:schemeClr val="accent1"/>
+          </a:effectRef>
+          <a:fontRef idx="minor">
+            <a:schemeClr val="lt1"/>
+          </a:fontRef>
+        </p:style>
+        <p:txBody>
+          <a:bodyPr rtlCol="0" anchor="ctr"/>
+          <a:lstStyle/>
+          <a:p>
+            <a:pPr algn="ctr"/>
+            <a:endParaRPr/>
+          </a:p>
+        </p:txBody>
+      </p:sp>
+      <p:sp>
+        <p:nvSpPr>
+          <p:cNvPr id="3" name="TextBox 2"/>
+          <p:cNvSpPr txBox="1"/>
+          <p:nvPr/>
+        </p:nvSpPr>
+        <p:spPr>
+          <a:xfrm>
+            <a:off x="1097280" y="2286000"/>
+            <a:ext cx="9966960" cy="2194560"/>
+          </a:xfrm>
+          <a:prstGeom prst="rect">
+            <a:avLst/>
+          </a:prstGeom>
+          <a:noFill/>
+        </p:spPr>
+        <p:txBody>
+          <a:bodyPr wrap="square">
+            <a:spAutoFit/>
+          </a:bodyPr>
+          <a:lstStyle/>
+          <a:p>
+            <a:pPr algn="l">
+              <a:spcAft>
+                <a:spcPts val="600"/>
+              </a:spcAft>
+            </a:pPr>
+            <a:r>
+              <a:rPr sz="1800" b="1" i="0">
+                <a:solidFill>
+                  <a:srgbClr val="97BC62"/>
+                </a:solidFill>
+                <a:latin typeface="Calibri"/>
+              </a:rPr>
+              <a:t>Quarter 4</a:t>
+            </a:r>
+          </a:p>
+          <a:p>
+            <a:pPr algn="l">
+              <a:spcAft>
+                <a:spcPts val="600"/>
+              </a:spcAft>
+            </a:pPr>
+            <a:r>
+              <a:rPr sz="4000" b="1" i="0">
+                <a:solidFill>
+                  <a:srgbClr val="FFFFFF"/>
+                </a:solidFill>
+                <a:latin typeface="Cambria"/>
+              </a:rPr>
+              <a:t>Consolidation &amp; Sending</a:t>
+            </a:r>
+          </a:p>
+          <a:p>
+            <a:pPr algn="l">
+              <a:spcAft>
+                <a:spcPts val="600"/>
+              </a:spcAft>
+            </a:pPr>
+            <a:r>
+              <a:rPr sz="1800" b="0" i="1">
+                <a:solidFill>
+                  <a:srgbClr val="E4EFDA"/>
+                </a:solidFill>
+                <a:latin typeface="Calibri"/>
+              </a:rPr>
+              <a:t>Weeks 18–22  ·  Five Wednesdays · the mercy cards, The Long Walk, two commissionings</a:t>
+            </a:r>
+          </a:p>
+        </p:txBody>
+      </p:sp>
+      <p:sp>
+        <p:nvSpPr>
+          <p:cNvPr id="90" name="SlideNum"/>
+          <p:cNvSpPr txBox="1"/>
+          <p:nvPr/>
+        </p:nvSpPr>
+        <p:spPr>
+          <a:xfrm>
+            <a:off x="11384280" y="6446520"/>
+            <a:ext cx="640080" cy="292608"/>
+          </a:xfrm>
+          <a:prstGeom prst="rect">
+            <a:avLst/>
+          </a:prstGeom>
+          <a:noFill/>
+        </p:spPr>
+        <p:txBody>
+          <a:bodyPr wrap="none" lIns="0" tIns="0" rIns="45720" bIns="0" anchor="ctr"/>
+          <a:lstStyle/>
+          <a:p>
+            <a:pPr algn="r"/>
+            <a:r>
+              <a:t>219</a:t>
+            </a:r>
+            <a:endParaRPr sz="1000" b="1">
+              <a:solidFill>
+                <a:srgbClr val="F1F6EC"/>
+              </a:solidFill>
+              <a:latin typeface="Calibri"/>
+            </a:endParaRPr>
+          </a:p>
+        </p:txBody>
+      </p:sp>
+    </p:spTree>
+  </p:cSld>
+  <p:clrMapOvr>
+    <a:masterClrMapping/>
+  </p:clrMapOvr>
+</p:sld>
+</file>
+
+<file path=ppt/slides/slide13.xml><?xml version="1.0" encoding="utf-8"?>
+<p:sld xmlns:a="http://schemas.openxmlformats.org/drawingml/2006/main" xmlns:p="http://schemas.openxmlformats.org/presentationml/2006/main" xmlns:r="http://schemas.openxmlformats.org/officeDocument/2006/relationships">
+  <p:cSld>
+    <p:spTree>
+      <p:nvGrpSpPr>
+        <p:cNvPr id="1" name=""/>
+        <p:cNvGrpSpPr/>
+        <p:nvPr/>
+      </p:nvGrpSpPr>
+      <p:grpSpPr/>
+      <p:sp>
+        <p:nvSpPr>
+          <p:cNvPr id="2" name="Rectangle 1"/>
+          <p:cNvSpPr/>
+          <p:nvPr/>
+        </p:nvSpPr>
+        <p:spPr>
+          <a:xfrm>
+            <a:off x="0" y="0"/>
+            <a:ext cx="12192000" cy="6858000"/>
+          </a:xfrm>
+          <a:prstGeom prst="rect">
+            <a:avLst/>
+          </a:prstGeom>
+          <a:solidFill>
+            <a:srgbClr val="FFFFFF"/>
+          </a:solidFill>
+          <a:ln>
+            <a:noFill/>
+          </a:ln>
+          <a:effectLst/>
+        </p:spPr>
+        <p:style>
+          <a:lnRef idx="1">
+            <a:schemeClr val="accent1"/>
+          </a:lnRef>
+          <a:fillRef idx="3">
+            <a:schemeClr val="accent1"/>
+          </a:fillRef>
+          <a:effectRef idx="2">
+            <a:schemeClr val="accent1"/>
+          </a:effectRef>
+          <a:fontRef idx="minor">
+            <a:schemeClr val="lt1"/>
+          </a:fontRef>
+        </p:style>
+        <p:txBody>
+          <a:bodyPr rtlCol="0" anchor="ctr"/>
+          <a:lstStyle/>
+          <a:p>
+            <a:pPr algn="ctr"/>
+          </a:p>
+        </p:txBody>
+      </p:sp>
+      <p:sp>
+        <p:nvSpPr>
+          <p:cNvPr id="3" name="TextBox 2"/>
+          <p:cNvSpPr txBox="1"/>
+          <p:nvPr/>
+        </p:nvSpPr>
+        <p:spPr>
+          <a:xfrm>
+            <a:off x="822960" y="502920"/>
+            <a:ext cx="10515600" cy="822960"/>
+          </a:xfrm>
+          <a:prstGeom prst="rect">
+            <a:avLst/>
+          </a:prstGeom>
+          <a:noFill/>
+        </p:spPr>
+        <p:txBody>
+          <a:bodyPr wrap="square">
+            <a:spAutoFit/>
+          </a:bodyPr>
+          <a:lstStyle/>
+          <a:p>
+            <a:r>
+              <a:rPr sz="2800" b="1">
+                <a:solidFill>
+                  <a:srgbClr val="2C5F2D"/>
+                </a:solidFill>
+                <a:latin typeface="Cambria"/>
+              </a:rPr>
+              <a:t>Where We Are — the Four Connects</a:t>
+            </a:r>
+          </a:p>
+        </p:txBody>
+      </p:sp>
+      <p:pic>
+        <p:nvPicPr>
+          <p:cNvPr id="4" name="Picture 3" descr="four-connects.png"/>
+          <p:cNvPicPr>
+            <a:picLocks noChangeAspect="1"/>
+          </p:cNvPicPr>
+          <p:nvPr/>
+        </p:nvPicPr>
+        <p:blipFill>
+          <a:blip r:embed="rId2"/>
+          <a:stretch>
+            <a:fillRect/>
+          </a:stretch>
+        </p:blipFill>
+        <p:spPr>
+          <a:xfrm>
+            <a:off x="932688" y="1645920"/>
+            <a:ext cx="10332720" cy="3708663"/>
+          </a:xfrm>
+          <a:prstGeom prst="rect">
+            <a:avLst/>
+          </a:prstGeom>
+        </p:spPr>
+      </p:pic>
+      <p:sp>
+        <p:nvSpPr>
+          <p:cNvPr id="5" name="TextBox 4"/>
+          <p:cNvSpPr txBox="1"/>
+          <p:nvPr/>
+        </p:nvSpPr>
+        <p:spPr>
+          <a:xfrm>
+            <a:off x="822960" y="5623560"/>
+            <a:ext cx="10515600" cy="914400"/>
+          </a:xfrm>
+          <a:prstGeom prst="rect">
+            <a:avLst/>
+          </a:prstGeom>
+          <a:noFill/>
+        </p:spPr>
+        <p:txBody>
+          <a:bodyPr wrap="square">
+            <a:spAutoFit/>
+          </a:bodyPr>
+          <a:lstStyle/>
+          <a:p>
+            <a:r>
+              <a:rPr sz="1800" b="0">
+                <a:solidFill>
+                  <a:srgbClr val="222B22"/>
+                </a:solidFill>
+                <a:latin typeface="Calibri"/>
+              </a:rPr>
+              <a:t>Session 17 holds the whole map — </a:t>
+            </a:r>
+            <a:r>
+              <a:rPr sz="1800" b="1">
+                <a:solidFill>
+                  <a:srgbClr val="2C5F2D"/>
+                </a:solidFill>
+                <a:latin typeface="Calibri"/>
+              </a:rPr>
+              <a:t>all four Connects</a:t>
+            </a:r>
+            <a:r>
+              <a:rPr sz="1800" b="0">
+                <a:solidFill>
+                  <a:srgbClr val="222B22"/>
+                </a:solidFill>
+                <a:latin typeface="Calibri"/>
+              </a:rPr>
+              <a:t>, wherever the year needs them tonight. Each connection makes the next one real (Matt. 22:37–40).</a:t>
+            </a:r>
+          </a:p>
+        </p:txBody>
+      </p:sp>
+      <p:sp>
+        <p:nvSpPr>
+          <p:cNvPr id="90" name="SlideNum"/>
+          <p:cNvSpPr txBox="1"/>
+          <p:nvPr/>
+        </p:nvSpPr>
+        <p:spPr>
+          <a:xfrm>
+            <a:off x="11384280" y="6446520"/>
+            <a:ext cx="640080" cy="292608"/>
+          </a:xfrm>
+          <a:prstGeom prst="rect">
+            <a:avLst/>
+          </a:prstGeom>
+          <a:noFill/>
+        </p:spPr>
+        <p:txBody>
+          <a:bodyPr wrap="none" lIns="0" tIns="0" rIns="45720" bIns="0" anchor="ctr"/>
+          <a:lstStyle/>
+          <a:p>
+            <a:pPr algn="r"/>
+            <a:r>
+              <a:t>209a</a:t>
+            </a:r>
+            <a:endParaRPr sz="1000" b="1">
+              <a:solidFill>
+                <a:srgbClr val="7A8A6E"/>
+              </a:solidFill>
+              <a:latin typeface="Calibri"/>
+            </a:endParaRPr>
+          </a:p>
+        </p:txBody>
+      </p:sp>
+    </p:spTree>
+  </p:cSld>
+  <p:clrMapOvr>
+    <a:masterClrMapping/>
+  </p:clrMapOvr>
+</p:sld>
+</file>
+
+<file path=ppt/slides/slide14.xml><?xml version="1.0" encoding="utf-8"?>
+<p:sld xmlns:a="http://schemas.openxmlformats.org/drawingml/2006/main" xmlns:p="http://schemas.openxmlformats.org/presentationml/2006/main" xmlns:r="http://schemas.openxmlformats.org/officeDocument/2006/relationships">
+  <p:cSld>
+    <p:spTree>
+      <p:nvGrpSpPr>
+        <p:cNvPr id="1" name=""/>
+        <p:cNvGrpSpPr/>
+        <p:nvPr/>
+      </p:nvGrpSpPr>
+      <p:grpSpPr/>
+      <p:sp>
+        <p:nvSpPr>
+          <p:cNvPr id="2" name="Rectangle 1"/>
+          <p:cNvSpPr/>
+          <p:nvPr/>
+        </p:nvSpPr>
+        <p:spPr>
+          <a:xfrm>
+            <a:off x="0" y="0"/>
+            <a:ext cx="12192000" cy="6858000"/>
+          </a:xfrm>
+          <a:prstGeom prst="rect">
+            <a:avLst/>
+          </a:prstGeom>
+          <a:solidFill>
+            <a:srgbClr val="FFFFFF"/>
+          </a:solidFill>
+          <a:ln>
+            <a:noFill/>
+          </a:ln>
+          <a:effectLst/>
+        </p:spPr>
+        <p:style>
+          <a:lnRef idx="1">
+            <a:schemeClr val="accent1"/>
+          </a:lnRef>
+          <a:fillRef idx="3">
+            <a:schemeClr val="accent1"/>
+          </a:fillRef>
+          <a:effectRef idx="2">
+            <a:schemeClr val="accent1"/>
+          </a:effectRef>
+          <a:fontRef idx="minor">
+            <a:schemeClr val="lt1"/>
+          </a:fontRef>
+        </p:style>
+        <p:txBody>
+          <a:bodyPr rtlCol="0" anchor="ctr"/>
+          <a:lstStyle/>
+          <a:p>
+            <a:pPr algn="ctr"/>
+          </a:p>
+        </p:txBody>
+      </p:sp>
+      <p:sp>
+        <p:nvSpPr>
+          <p:cNvPr id="3" name="TextBox 2"/>
+          <p:cNvSpPr txBox="1"/>
+          <p:nvPr/>
+        </p:nvSpPr>
+        <p:spPr>
+          <a:xfrm>
+            <a:off x="822960" y="502920"/>
+            <a:ext cx="10515600" cy="822960"/>
+          </a:xfrm>
+          <a:prstGeom prst="rect">
+            <a:avLst/>
+          </a:prstGeom>
+          <a:noFill/>
+        </p:spPr>
+        <p:txBody>
+          <a:bodyPr wrap="square">
+            <a:spAutoFit/>
+          </a:bodyPr>
+          <a:lstStyle/>
+          <a:p>
+            <a:r>
+              <a:rPr sz="2800" b="1">
+                <a:solidFill>
+                  <a:srgbClr val="2C5F2D"/>
+                </a:solidFill>
+                <a:latin typeface="Cambria"/>
+              </a:rPr>
+              <a:t>The Take-Home Sheet — the Daily Rhythm</a:t>
+            </a:r>
+          </a:p>
+        </p:txBody>
+      </p:sp>
+      <p:pic>
+        <p:nvPicPr>
+          <p:cNvPr id="4" name="Picture 3" descr="s17_part1.png"/>
+          <p:cNvPicPr>
+            <a:picLocks noChangeAspect="1"/>
+          </p:cNvPicPr>
+          <p:nvPr/>
+        </p:nvPicPr>
+        <p:blipFill>
+          <a:blip r:embed="rId2"/>
+          <a:stretch>
+            <a:fillRect/>
+          </a:stretch>
+        </p:blipFill>
+        <p:spPr>
+          <a:xfrm>
+            <a:off x="1798167" y="1463040"/>
+            <a:ext cx="8595360" cy="4039819"/>
+          </a:xfrm>
+          <a:prstGeom prst="rect">
+            <a:avLst/>
+          </a:prstGeom>
+          <a:ln w="12700">
+            <a:solidFill>
+              <a:srgbClr val="C8C8C8"/>
+            </a:solidFill>
+          </a:ln>
+        </p:spPr>
+      </p:pic>
+      <p:sp>
+        <p:nvSpPr>
+          <p:cNvPr id="5" name="TextBox 4"/>
+          <p:cNvSpPr txBox="1"/>
+          <p:nvPr/>
+        </p:nvSpPr>
+        <p:spPr>
+          <a:xfrm>
+            <a:off x="822960" y="6355080"/>
+            <a:ext cx="10515600" cy="411480"/>
+          </a:xfrm>
+          <a:prstGeom prst="rect">
+            <a:avLst/>
+          </a:prstGeom>
+          <a:noFill/>
+        </p:spPr>
+        <p:txBody>
+          <a:bodyPr wrap="square">
+            <a:spAutoFit/>
+          </a:bodyPr>
+          <a:lstStyle/>
+          <a:p>
+            <a:r>
+              <a:rPr sz="1400" i="1">
+                <a:solidFill>
+                  <a:srgbClr val="595959"/>
+                </a:solidFill>
+                <a:latin typeface="Calibri"/>
+              </a:rPr>
+              <a:t>Handed out now — this is the sheet in your hands.</a:t>
+            </a:r>
+          </a:p>
+        </p:txBody>
+      </p:sp>
+      <p:sp>
+        <p:nvSpPr>
+          <p:cNvPr id="90" name="SlideNum"/>
+          <p:cNvSpPr txBox="1"/>
+          <p:nvPr/>
+        </p:nvSpPr>
+        <p:spPr>
+          <a:xfrm>
+            <a:off x="11384280" y="6446520"/>
+            <a:ext cx="640080" cy="292608"/>
+          </a:xfrm>
+          <a:prstGeom prst="rect">
+            <a:avLst/>
+          </a:prstGeom>
+          <a:noFill/>
+        </p:spPr>
+        <p:txBody>
+          <a:bodyPr wrap="none" lIns="0" tIns="0" rIns="45720" bIns="0" anchor="ctr"/>
+          <a:lstStyle/>
+          <a:p>
+            <a:pPr algn="r"/>
+            <a:r>
+              <a:t>216</a:t>
+            </a:r>
+            <a:endParaRPr sz="1000" b="1">
+              <a:solidFill>
+                <a:srgbClr val="7A8A6E"/>
+              </a:solidFill>
+              <a:latin typeface="Calibri"/>
+            </a:endParaRPr>
+          </a:p>
+        </p:txBody>
+      </p:sp>
+    </p:spTree>
+  </p:cSld>
+  <p:clrMapOvr>
+    <a:masterClrMapping/>
+  </p:clrMapOvr>
+</p:sld>
+</file>
+
+<file path=ppt/slides/slide15.xml><?xml version="1.0" encoding="utf-8"?>
+<p:sld xmlns:a="http://schemas.openxmlformats.org/drawingml/2006/main" xmlns:p="http://schemas.openxmlformats.org/presentationml/2006/main" xmlns:r="http://schemas.openxmlformats.org/officeDocument/2006/relationships">
+  <p:cSld>
+    <p:spTree>
+      <p:nvGrpSpPr>
+        <p:cNvPr id="1" name=""/>
+        <p:cNvGrpSpPr/>
+        <p:nvPr/>
+      </p:nvGrpSpPr>
+      <p:grpSpPr/>
+      <p:sp>
+        <p:nvSpPr>
+          <p:cNvPr id="2" name="Rectangle 1"/>
+          <p:cNvSpPr/>
+          <p:nvPr/>
+        </p:nvSpPr>
+        <p:spPr>
+          <a:xfrm>
+            <a:off x="0" y="0"/>
+            <a:ext cx="12192000" cy="6858000"/>
+          </a:xfrm>
+          <a:prstGeom prst="rect">
+            <a:avLst/>
+          </a:prstGeom>
+          <a:solidFill>
+            <a:srgbClr val="FFFFFF"/>
+          </a:solidFill>
+          <a:ln>
+            <a:noFill/>
+          </a:ln>
+          <a:effectLst/>
+        </p:spPr>
+        <p:style>
+          <a:lnRef idx="1">
+            <a:schemeClr val="accent1"/>
+          </a:lnRef>
+          <a:fillRef idx="3">
+            <a:schemeClr val="accent1"/>
+          </a:fillRef>
+          <a:effectRef idx="2">
+            <a:schemeClr val="accent1"/>
+          </a:effectRef>
+          <a:fontRef idx="minor">
+            <a:schemeClr val="lt1"/>
+          </a:fontRef>
+        </p:style>
+        <p:txBody>
+          <a:bodyPr rtlCol="0" anchor="ctr"/>
+          <a:lstStyle/>
+          <a:p>
+            <a:pPr algn="ctr"/>
+          </a:p>
+        </p:txBody>
+      </p:sp>
+      <p:sp>
+        <p:nvSpPr>
+          <p:cNvPr id="3" name="TextBox 2"/>
+          <p:cNvSpPr txBox="1"/>
+          <p:nvPr/>
+        </p:nvSpPr>
+        <p:spPr>
+          <a:xfrm>
+            <a:off x="822960" y="502920"/>
+            <a:ext cx="10515600" cy="822960"/>
+          </a:xfrm>
+          <a:prstGeom prst="rect">
+            <a:avLst/>
+          </a:prstGeom>
+          <a:noFill/>
+        </p:spPr>
+        <p:txBody>
+          <a:bodyPr wrap="square">
+            <a:spAutoFit/>
+          </a:bodyPr>
+          <a:lstStyle/>
+          <a:p>
+            <a:r>
+              <a:rPr sz="2800" b="1">
+                <a:solidFill>
+                  <a:srgbClr val="2C5F2D"/>
+                </a:solidFill>
+                <a:latin typeface="Cambria"/>
+              </a:rPr>
+              <a:t>The Take-Home Sheet — the Four Parts</a:t>
+            </a:r>
+          </a:p>
+        </p:txBody>
+      </p:sp>
+      <p:pic>
+        <p:nvPicPr>
+          <p:cNvPr id="4" name="Picture 3" descr="s17_part2.png"/>
+          <p:cNvPicPr>
+            <a:picLocks noChangeAspect="1"/>
+          </p:cNvPicPr>
+          <p:nvPr/>
+        </p:nvPicPr>
+        <p:blipFill>
+          <a:blip r:embed="rId2"/>
+          <a:stretch>
+            <a:fillRect/>
+          </a:stretch>
+        </p:blipFill>
+        <p:spPr>
+          <a:xfrm>
+            <a:off x="2258348" y="1463040"/>
+            <a:ext cx="7674998" cy="4709159"/>
+          </a:xfrm>
+          <a:prstGeom prst="rect">
+            <a:avLst/>
+          </a:prstGeom>
+          <a:ln w="12700">
+            <a:solidFill>
+              <a:srgbClr val="C8C8C8"/>
+            </a:solidFill>
+          </a:ln>
+        </p:spPr>
+      </p:pic>
+      <p:sp>
+        <p:nvSpPr>
+          <p:cNvPr id="5" name="TextBox 4"/>
+          <p:cNvSpPr txBox="1"/>
+          <p:nvPr/>
+        </p:nvSpPr>
+        <p:spPr>
+          <a:xfrm>
+            <a:off x="822960" y="6355080"/>
+            <a:ext cx="10515600" cy="411480"/>
+          </a:xfrm>
+          <a:prstGeom prst="rect">
+            <a:avLst/>
+          </a:prstGeom>
+          <a:noFill/>
+        </p:spPr>
+        <p:txBody>
+          <a:bodyPr wrap="square">
+            <a:spAutoFit/>
+          </a:bodyPr>
+          <a:lstStyle/>
+          <a:p>
+            <a:r>
+              <a:rPr sz="1400" i="1">
+                <a:solidFill>
+                  <a:srgbClr val="595959"/>
+                </a:solidFill>
+                <a:latin typeface="Calibri"/>
+              </a:rPr>
+              <a:t>One practice at a time — and a partner expecting you at the end of week one.</a:t>
+            </a:r>
+          </a:p>
+        </p:txBody>
+      </p:sp>
+      <p:sp>
+        <p:nvSpPr>
+          <p:cNvPr id="90" name="SlideNum"/>
+          <p:cNvSpPr txBox="1"/>
+          <p:nvPr/>
+        </p:nvSpPr>
+        <p:spPr>
+          <a:xfrm>
+            <a:off x="11384280" y="6446520"/>
+            <a:ext cx="640080" cy="292608"/>
+          </a:xfrm>
+          <a:prstGeom prst="rect">
+            <a:avLst/>
+          </a:prstGeom>
+          <a:noFill/>
+        </p:spPr>
+        <p:txBody>
+          <a:bodyPr wrap="none" lIns="0" tIns="0" rIns="45720" bIns="0" anchor="ctr"/>
+          <a:lstStyle/>
+          <a:p>
+            <a:pPr algn="r"/>
+            <a:r>
+              <a:t>216a</a:t>
+            </a:r>
+            <a:endParaRPr sz="1000" b="1">
+              <a:solidFill>
+                <a:srgbClr val="7A8A6E"/>
+              </a:solidFill>
+              <a:latin typeface="Calibri"/>
+            </a:endParaRPr>
+          </a:p>
+        </p:txBody>
+      </p:sp>
+    </p:spTree>
+  </p:cSld>
+  <p:clrMapOvr>
+    <a:masterClrMapping/>
+  </p:clrMapOvr>
+</p:sld>
+</file>
+
+<file path=ppt/slides/slide2.xml><?xml version="1.0" encoding="utf-8"?>
 <p:sld xmlns:a="http://schemas.openxmlformats.org/drawingml/2006/main" xmlns:r="http://schemas.openxmlformats.org/officeDocument/2006/relationships" xmlns:p="http://schemas.openxmlformats.org/presentationml/2006/main">
   <p:cSld>
     <p:spTree>
@@ -4822,7 +6486,7 @@
 </p:sld>
 </file>
 
-<file path=ppt/slides/slide210.xml><?xml version="1.0" encoding="utf-8"?>
+<file path=ppt/slides/slide3.xml><?xml version="1.0" encoding="utf-8"?>
 <p:sld xmlns:a="http://schemas.openxmlformats.org/drawingml/2006/main" xmlns:r="http://schemas.openxmlformats.org/officeDocument/2006/relationships" xmlns:p="http://schemas.openxmlformats.org/presentationml/2006/main">
   <p:cSld>
     <p:spTree>
@@ -5198,7 +6862,7 @@
 </p:sld>
 </file>
 
-<file path=ppt/slides/slide211.xml><?xml version="1.0" encoding="utf-8"?>
+<file path=ppt/slides/slide4.xml><?xml version="1.0" encoding="utf-8"?>
 <p:sld xmlns:a="http://schemas.openxmlformats.org/drawingml/2006/main" xmlns:r="http://schemas.openxmlformats.org/officeDocument/2006/relationships" xmlns:p="http://schemas.openxmlformats.org/presentationml/2006/main">
   <p:cSld>
     <p:spTree>
@@ -5500,7 +7164,7 @@
 </p:sld>
 </file>
 
-<file path=ppt/slides/slide212.xml><?xml version="1.0" encoding="utf-8"?>
+<file path=ppt/slides/slide5.xml><?xml version="1.0" encoding="utf-8"?>
 <p:sld xmlns:a="http://schemas.openxmlformats.org/drawingml/2006/main" xmlns:r="http://schemas.openxmlformats.org/officeDocument/2006/relationships" xmlns:p="http://schemas.openxmlformats.org/presentationml/2006/main">
   <p:cSld>
     <p:spTree>
@@ -5797,7 +7461,7 @@
 </p:sld>
 </file>
 
-<file path=ppt/slides/slide213.xml><?xml version="1.0" encoding="utf-8"?>
+<file path=ppt/slides/slide6.xml><?xml version="1.0" encoding="utf-8"?>
 <p:sld xmlns:a="http://schemas.openxmlformats.org/drawingml/2006/main" xmlns:r="http://schemas.openxmlformats.org/officeDocument/2006/relationships" xmlns:p="http://schemas.openxmlformats.org/presentationml/2006/main">
   <p:cSld>
     <p:spTree>
@@ -6044,7 +7708,7 @@
 </p:sld>
 </file>
 
-<file path=ppt/slides/slide214.xml><?xml version="1.0" encoding="utf-8"?>
+<file path=ppt/slides/slide7.xml><?xml version="1.0" encoding="utf-8"?>
 <p:sld xmlns:a="http://schemas.openxmlformats.org/drawingml/2006/main" xmlns:r="http://schemas.openxmlformats.org/officeDocument/2006/relationships" xmlns:p="http://schemas.openxmlformats.org/presentationml/2006/main">
   <p:cSld>
     <p:spTree>
@@ -6291,7 +7955,7 @@
 </p:sld>
 </file>
 
-<file path=ppt/slides/slide215.xml><?xml version="1.0" encoding="utf-8"?>
+<file path=ppt/slides/slide8.xml><?xml version="1.0" encoding="utf-8"?>
 <p:sld xmlns:a="http://schemas.openxmlformats.org/drawingml/2006/main" xmlns:r="http://schemas.openxmlformats.org/officeDocument/2006/relationships" xmlns:p="http://schemas.openxmlformats.org/presentationml/2006/main">
   <p:cSld>
     <p:spTree>
@@ -6616,1117 +8280,6 @@
           </a:effectLst>
         </p:spPr>
       </p:pic>
-    </p:spTree>
-  </p:cSld>
-  <p:clrMapOvr>
-    <a:masterClrMapping/>
-  </p:clrMapOvr>
-</p:sld>
-</file>
-
-<file path=ppt/slides/slide216.xml><?xml version="1.0" encoding="utf-8"?>
-<p:sld xmlns:a="http://schemas.openxmlformats.org/drawingml/2006/main" xmlns:r="http://schemas.openxmlformats.org/officeDocument/2006/relationships" xmlns:p="http://schemas.openxmlformats.org/presentationml/2006/main">
-  <p:cSld>
-    <p:spTree>
-      <p:nvGrpSpPr>
-        <p:cNvPr id="1" name=""/>
-        <p:cNvGrpSpPr/>
-        <p:nvPr/>
-      </p:nvGrpSpPr>
-      <p:grpSpPr>
-        <a:xfrm>
-          <a:off x="0" y="0"/>
-          <a:ext cx="0" cy="0"/>
-          <a:chOff x="0" y="0"/>
-          <a:chExt cx="0" cy="0"/>
-        </a:xfrm>
-      </p:grpSpPr>
-      <p:sp>
-        <p:nvSpPr>
-          <p:cNvPr id="2" name="Rectangle 1"/>
-          <p:cNvSpPr/>
-          <p:nvPr/>
-        </p:nvSpPr>
-        <p:spPr>
-          <a:xfrm>
-            <a:off x="0" y="0"/>
-            <a:ext cx="12191695" cy="6858000"/>
-          </a:xfrm>
-          <a:prstGeom prst="rect">
-            <a:avLst/>
-          </a:prstGeom>
-          <a:solidFill>
-            <a:srgbClr val="FFFFFF"/>
-          </a:solidFill>
-          <a:ln>
-            <a:noFill/>
-          </a:ln>
-        </p:spPr>
-        <p:txBody>
-          <a:bodyPr/>
-          <a:lstStyle/>
-          <a:p>
-            <a:endParaRPr/>
-          </a:p>
-        </p:txBody>
-      </p:sp>
-      <p:sp>
-        <p:nvSpPr>
-          <p:cNvPr id="3" name="TextBox 2"/>
-          <p:cNvSpPr txBox="1"/>
-          <p:nvPr/>
-        </p:nvSpPr>
-        <p:spPr>
-          <a:xfrm>
-            <a:off x="822960" y="502920"/>
-            <a:ext cx="10515600" cy="822960"/>
-          </a:xfrm>
-          <a:prstGeom prst="rect">
-            <a:avLst/>
-          </a:prstGeom>
-          <a:noFill/>
-        </p:spPr>
-        <p:txBody>
-          <a:bodyPr wrap="square">
-            <a:spAutoFit/>
-          </a:bodyPr>
-          <a:lstStyle/>
-          <a:p>
-            <a:pPr algn="l">
-              <a:spcAft>
-                <a:spcPts val="600"/>
-              </a:spcAft>
-            </a:pPr>
-            <a:r>
-              <a:rPr sz="2800" b="1" i="0">
-                <a:solidFill>
-                  <a:srgbClr val="2C5F2D"/>
-                </a:solidFill>
-                <a:latin typeface="Cambria"/>
-              </a:rPr>
-              <a:t>Your Take-Home Card — This Session’s Practice</a:t>
-            </a:r>
-          </a:p>
-        </p:txBody>
-      </p:sp>
-      <p:sp>
-        <p:nvSpPr>
-          <p:cNvPr id="90" name="SlideNum"/>
-          <p:cNvSpPr txBox="1"/>
-          <p:nvPr/>
-        </p:nvSpPr>
-        <p:spPr>
-          <a:xfrm>
-            <a:off x="11384280" y="6446520"/>
-            <a:ext cx="640080" cy="292608"/>
-          </a:xfrm>
-          <a:prstGeom prst="rect">
-            <a:avLst/>
-          </a:prstGeom>
-          <a:noFill/>
-        </p:spPr>
-        <p:txBody>
-          <a:bodyPr wrap="none" lIns="0" tIns="0" rIns="45720" bIns="0" anchor="ctr"/>
-          <a:lstStyle/>
-          <a:p>
-            <a:pPr algn="r"/>
-            <a:r>
-              <a:t>216</a:t>
-            </a:r>
-            <a:endParaRPr sz="1000" b="1">
-              <a:solidFill>
-                <a:srgbClr val="7A8A6E"/>
-              </a:solidFill>
-              <a:latin typeface="Calibri"/>
-            </a:endParaRPr>
-          </a:p>
-        </p:txBody>
-      </p:sp>
-      <p:pic>
-        <p:nvPicPr>
-          <p:cNvPr id="270" name="CardImage" descr="the Week 17 check-off card, as handed out"/>
-          <p:cNvPicPr>
-            <a:picLocks noChangeAspect="1"/>
-          </p:cNvPicPr>
-          <p:nvPr/>
-        </p:nvPicPr>
-        <p:blipFill>
-          <a:blip r:embed="rId3"/>
-          <a:stretch>
-            <a:fillRect/>
-          </a:stretch>
-        </p:blipFill>
-        <p:spPr>
-          <a:xfrm>
-            <a:off x="1158087" y="1554480"/>
-            <a:ext cx="9875520" cy="4112634"/>
-          </a:xfrm>
-          <a:prstGeom prst="rect">
-            <a:avLst/>
-          </a:prstGeom>
-          <a:ln w="76200">
-            <a:solidFill>
-              <a:srgbClr val="FFFFFF"/>
-            </a:solidFill>
-          </a:ln>
-          <a:effectLst>
-            <a:outerShdw blurRad="63500" dist="25400" dir="5400000" rotWithShape="0">
-              <a:srgbClr val="000000">
-                <a:alpha val="35000"/>
-              </a:srgbClr>
-            </a:outerShdw>
-          </a:effectLst>
-        </p:spPr>
-      </p:pic>
-      <p:sp>
-        <p:nvSpPr>
-          <p:cNvPr id="271" name="Caption"/>
-          <p:cNvSpPr txBox="1"/>
-          <p:nvPr/>
-        </p:nvSpPr>
-        <p:spPr>
-          <a:xfrm>
-            <a:off x="822960" y="5849994"/>
-            <a:ext cx="10515600" cy="457200"/>
-          </a:xfrm>
-          <a:prstGeom prst="rect">
-            <a:avLst/>
-          </a:prstGeom>
-          <a:noFill/>
-        </p:spPr>
-        <p:txBody>
-          <a:bodyPr wrap="square"/>
-          <a:lstStyle/>
-          <a:p>
-            <a:pPr algn="ctr"/>
-            <a:r>
-              <a:rPr sz="1800" b="0" i="1">
-                <a:solidFill>
-                  <a:srgbClr val="222B22"/>
-                </a:solidFill>
-                <a:latin typeface="Calibri"/>
-              </a:rPr>
-              <a:t>Handed out now — fridge, mirror, journal pocket.</a:t>
-            </a:r>
-          </a:p>
-        </p:txBody>
-      </p:sp>
-    </p:spTree>
-  </p:cSld>
-  <p:clrMapOvr>
-    <a:masterClrMapping/>
-  </p:clrMapOvr>
-</p:sld>
-</file>
-
-<file path=ppt/slides/slide217.xml><?xml version="1.0" encoding="utf-8"?>
-<p:sld xmlns:a="http://schemas.openxmlformats.org/drawingml/2006/main" xmlns:r="http://schemas.openxmlformats.org/officeDocument/2006/relationships" xmlns:p="http://schemas.openxmlformats.org/presentationml/2006/main">
-  <p:cSld>
-    <p:spTree>
-      <p:nvGrpSpPr>
-        <p:cNvPr id="1" name=""/>
-        <p:cNvGrpSpPr/>
-        <p:nvPr/>
-      </p:nvGrpSpPr>
-      <p:grpSpPr>
-        <a:xfrm>
-          <a:off x="0" y="0"/>
-          <a:ext cx="0" cy="0"/>
-          <a:chOff x="0" y="0"/>
-          <a:chExt cx="0" cy="0"/>
-        </a:xfrm>
-      </p:grpSpPr>
-      <p:sp>
-        <p:nvSpPr>
-          <p:cNvPr id="2" name="Rectangle 1"/>
-          <p:cNvSpPr/>
-          <p:nvPr/>
-        </p:nvSpPr>
-        <p:spPr>
-          <a:xfrm>
-            <a:off x="0" y="0"/>
-            <a:ext cx="12191695" cy="6858000"/>
-          </a:xfrm>
-          <a:prstGeom prst="rect">
-            <a:avLst/>
-          </a:prstGeom>
-          <a:solidFill>
-            <a:srgbClr val="FFFFFF"/>
-          </a:solidFill>
-          <a:ln>
-            <a:noFill/>
-          </a:ln>
-        </p:spPr>
-        <p:txBody>
-          <a:bodyPr/>
-          <a:lstStyle/>
-          <a:p>
-            <a:endParaRPr/>
-          </a:p>
-        </p:txBody>
-      </p:sp>
-      <p:sp>
-        <p:nvSpPr>
-          <p:cNvPr id="3" name="TextBox 2"/>
-          <p:cNvSpPr txBox="1"/>
-          <p:nvPr/>
-        </p:nvSpPr>
-        <p:spPr>
-          <a:xfrm>
-            <a:off x="822960" y="502920"/>
-            <a:ext cx="10515600" cy="822960"/>
-          </a:xfrm>
-          <a:prstGeom prst="rect">
-            <a:avLst/>
-          </a:prstGeom>
-          <a:noFill/>
-        </p:spPr>
-        <p:txBody>
-          <a:bodyPr wrap="square">
-            <a:spAutoFit/>
-          </a:bodyPr>
-          <a:lstStyle/>
-          <a:p>
-            <a:pPr algn="l">
-              <a:spcAft>
-                <a:spcPts val="600"/>
-              </a:spcAft>
-            </a:pPr>
-            <a:r>
-              <a:rPr sz="2800" b="1" i="0">
-                <a:solidFill>
-                  <a:srgbClr val="2C5F2D"/>
-                </a:solidFill>
-                <a:latin typeface="Cambria"/>
-              </a:rPr>
-              <a:t>The Leader Feedback Round</a:t>
-            </a:r>
-          </a:p>
-        </p:txBody>
-      </p:sp>
-      <p:sp>
-        <p:nvSpPr>
-          <p:cNvPr id="4" name="TextBox 4"/>
-          <p:cNvSpPr txBox="1"/>
-          <p:nvPr/>
-        </p:nvSpPr>
-        <p:spPr>
-          <a:xfrm>
-            <a:off x="822960" y="1554480"/>
-            <a:ext cx="6675120" cy="4892040"/>
-          </a:xfrm>
-          <a:prstGeom prst="rect">
-            <a:avLst/>
-          </a:prstGeom>
-          <a:noFill/>
-        </p:spPr>
-        <p:txBody>
-          <a:bodyPr wrap="square" lIns="91440" tIns="91440" rIns="91440" bIns="91440"/>
-          <a:lstStyle/>
-          <a:p>
-            <a:pPr marL="274320" indent="-274320">
-              <a:spcAft>
-                <a:spcPts val="900"/>
-              </a:spcAft>
-            </a:pPr>
-            <a:r>
-              <a:rPr sz="2800" b="1" i="0">
-                <a:solidFill>
-                  <a:srgbClr val="97BC62"/>
-                </a:solidFill>
-                <a:latin typeface="Calibri"/>
-              </a:rPr>
-              <a:t>•  </a:t>
-            </a:r>
-            <a:r>
-              <a:rPr sz="2800" b="0" i="0">
-                <a:solidFill>
-                  <a:srgbClr val="222B22"/>
-                </a:solidFill>
-                <a:latin typeface="Calibri"/>
-              </a:rPr>
-              <a:t>Two rounds, same as every session — the container holder first, then the content presenter: three things each</a:t>
-            </a:r>
-          </a:p>
-          <a:p>
-            <a:pPr marL="685800" indent="-274320">
-              <a:spcAft>
-                <a:spcPts val="700"/>
-              </a:spcAft>
-            </a:pPr>
-            <a:r>
-              <a:rPr sz="2000" b="1" i="0">
-                <a:solidFill>
-                  <a:srgbClr val="97BC62"/>
-                </a:solidFill>
-                <a:latin typeface="Calibri"/>
-              </a:rPr>
-              <a:t>–  </a:t>
-            </a:r>
-            <a:r>
-              <a:rPr sz="2000" b="0" i="1">
-                <a:solidFill>
-                  <a:srgbClr val="222B22"/>
-                </a:solidFill>
-                <a:latin typeface="Calibri"/>
-              </a:rPr>
-              <a:t>“What I think went well tonight: ______”</a:t>
-            </a:r>
-          </a:p>
-          <a:p>
-            <a:pPr marL="685800" indent="-274320">
-              <a:spcAft>
-                <a:spcPts val="700"/>
-              </a:spcAft>
-            </a:pPr>
-            <a:r>
-              <a:rPr sz="2000" b="1" i="0">
-                <a:solidFill>
-                  <a:srgbClr val="97BC62"/>
-                </a:solidFill>
-                <a:latin typeface="Calibri"/>
-              </a:rPr>
-              <a:t>–  </a:t>
-            </a:r>
-            <a:r>
-              <a:rPr sz="2000" b="0" i="1">
-                <a:solidFill>
-                  <a:srgbClr val="222B22"/>
-                </a:solidFill>
-                <a:latin typeface="Calibri"/>
-              </a:rPr>
-              <a:t>“What I’d do differently next time: ______”</a:t>
-            </a:r>
-          </a:p>
-          <a:p>
-            <a:pPr marL="685800" indent="-274320">
-              <a:spcAft>
-                <a:spcPts val="700"/>
-              </a:spcAft>
-            </a:pPr>
-            <a:r>
-              <a:rPr sz="2000" b="1" i="0">
-                <a:solidFill>
-                  <a:srgbClr val="97BC62"/>
-                </a:solidFill>
-                <a:latin typeface="Calibri"/>
-              </a:rPr>
-              <a:t>–  </a:t>
-            </a:r>
-            <a:r>
-              <a:rPr sz="2000" b="0" i="1">
-                <a:solidFill>
-                  <a:srgbClr val="222B22"/>
-                </a:solidFill>
-                <a:latin typeface="Calibri"/>
-              </a:rPr>
-              <a:t>“If I were to teach tonight’s process to someone, I would tell them: ______”</a:t>
-            </a:r>
-          </a:p>
-          <a:p>
-            <a:pPr marL="274320" indent="-274320">
-              <a:spcAft>
-                <a:spcPts val="900"/>
-              </a:spcAft>
-            </a:pPr>
-            <a:r>
-              <a:rPr sz="2800" b="1" i="0">
-                <a:solidFill>
-                  <a:srgbClr val="97BC62"/>
-                </a:solidFill>
-                <a:latin typeface="Calibri"/>
-              </a:rPr>
-              <a:t>•  </a:t>
-            </a:r>
-            <a:r>
-              <a:rPr sz="2800" b="0" i="0">
-                <a:solidFill>
-                  <a:srgbClr val="222B22"/>
-                </a:solidFill>
-                <a:latin typeface="Calibri"/>
-              </a:rPr>
-              <a:t>Then the room — the same two questions about tonight</a:t>
-            </a:r>
-          </a:p>
-          <a:p>
-            <a:pPr marL="274320" indent="-274320">
-              <a:spcAft>
-                <a:spcPts val="900"/>
-              </a:spcAft>
-            </a:pPr>
-            <a:r>
-              <a:rPr sz="2800" b="1" i="0">
-                <a:solidFill>
-                  <a:srgbClr val="97BC62"/>
-                </a:solidFill>
-                <a:latin typeface="Calibri"/>
-              </a:rPr>
-              <a:t>•  </a:t>
-            </a:r>
-            <a:r>
-              <a:rPr sz="2800" b="0" i="0">
-                <a:solidFill>
-                  <a:srgbClr val="222B22"/>
-                </a:solidFill>
-                <a:latin typeface="Calibri"/>
-              </a:rPr>
-              <a:t>The leaders receive without defending — “thank you” is the whole response</a:t>
-            </a:r>
-          </a:p>
-        </p:txBody>
-      </p:sp>
-      <p:sp>
-        <p:nvSpPr>
-          <p:cNvPr id="90" name="SlideNum"/>
-          <p:cNvSpPr txBox="1"/>
-          <p:nvPr/>
-        </p:nvSpPr>
-        <p:spPr>
-          <a:xfrm>
-            <a:off x="11384280" y="6446520"/>
-            <a:ext cx="640080" cy="292608"/>
-          </a:xfrm>
-          <a:prstGeom prst="rect">
-            <a:avLst/>
-          </a:prstGeom>
-          <a:noFill/>
-        </p:spPr>
-        <p:txBody>
-          <a:bodyPr wrap="none" lIns="0" tIns="0" rIns="45720" bIns="0" anchor="ctr"/>
-          <a:lstStyle/>
-          <a:p>
-            <a:pPr algn="r"/>
-            <a:r>
-              <a:t>217</a:t>
-            </a:r>
-            <a:endParaRPr sz="1000" b="1">
-              <a:solidFill>
-                <a:srgbClr val="7A8A6E"/>
-              </a:solidFill>
-              <a:latin typeface="Calibri"/>
-            </a:endParaRPr>
-          </a:p>
-        </p:txBody>
-      </p:sp>
-      <p:pic>
-        <p:nvPicPr>
-          <p:cNvPr id="33" name="Picture 33" descr="compass on the trail - the weekly bearing check"/>
-          <p:cNvPicPr>
-            <a:picLocks noChangeAspect="1"/>
-          </p:cNvPicPr>
-          <p:nvPr/>
-        </p:nvPicPr>
-        <p:blipFill>
-          <a:blip r:embed="rId3"/>
-          <a:stretch>
-            <a:fillRect/>
-          </a:stretch>
-        </p:blipFill>
-        <p:spPr>
-          <a:xfrm>
-            <a:off x="8106160" y="1463040"/>
-            <a:ext cx="3259831" cy="4892040"/>
-          </a:xfrm>
-          <a:prstGeom prst="rect">
-            <a:avLst/>
-          </a:prstGeom>
-          <a:ln w="76200">
-            <a:solidFill>
-              <a:srgbClr val="FFFFFF"/>
-            </a:solidFill>
-          </a:ln>
-          <a:effectLst>
-            <a:outerShdw blurRad="63500" dist="25400" dir="5400000" rotWithShape="0">
-              <a:srgbClr val="000000">
-                <a:alpha val="35000"/>
-              </a:srgbClr>
-            </a:outerShdw>
-          </a:effectLst>
-        </p:spPr>
-      </p:pic>
-    </p:spTree>
-  </p:cSld>
-  <p:clrMapOvr>
-    <a:masterClrMapping/>
-  </p:clrMapOvr>
-</p:sld>
-</file>
-
-<file path=ppt/slides/slide218.xml><?xml version="1.0" encoding="utf-8"?>
-<p:sld xmlns:a="http://schemas.openxmlformats.org/drawingml/2006/main" xmlns:r="http://schemas.openxmlformats.org/officeDocument/2006/relationships" xmlns:p="http://schemas.openxmlformats.org/presentationml/2006/main">
-  <p:cSld>
-    <p:spTree>
-      <p:nvGrpSpPr>
-        <p:cNvPr id="1" name=""/>
-        <p:cNvGrpSpPr/>
-        <p:nvPr/>
-      </p:nvGrpSpPr>
-      <p:grpSpPr>
-        <a:xfrm>
-          <a:off x="0" y="0"/>
-          <a:ext cx="0" cy="0"/>
-          <a:chOff x="0" y="0"/>
-          <a:chExt cx="0" cy="0"/>
-        </a:xfrm>
-      </p:grpSpPr>
-      <p:sp>
-        <p:nvSpPr>
-          <p:cNvPr id="2" name="Rectangle 1"/>
-          <p:cNvSpPr/>
-          <p:nvPr/>
-        </p:nvSpPr>
-        <p:spPr>
-          <a:xfrm>
-            <a:off x="0" y="0"/>
-            <a:ext cx="12191695" cy="6858000"/>
-          </a:xfrm>
-          <a:prstGeom prst="rect">
-            <a:avLst/>
-          </a:prstGeom>
-          <a:solidFill>
-            <a:srgbClr val="FFFFFF"/>
-          </a:solidFill>
-          <a:ln>
-            <a:noFill/>
-          </a:ln>
-        </p:spPr>
-        <p:txBody>
-          <a:bodyPr/>
-          <a:lstStyle/>
-          <a:p>
-            <a:endParaRPr/>
-          </a:p>
-        </p:txBody>
-      </p:sp>
-      <p:sp>
-        <p:nvSpPr>
-          <p:cNvPr id="3" name="TextBox 2"/>
-          <p:cNvSpPr txBox="1"/>
-          <p:nvPr/>
-        </p:nvSpPr>
-        <p:spPr>
-          <a:xfrm>
-            <a:off x="822960" y="502920"/>
-            <a:ext cx="10515600" cy="822960"/>
-          </a:xfrm>
-          <a:prstGeom prst="rect">
-            <a:avLst/>
-          </a:prstGeom>
-          <a:noFill/>
-        </p:spPr>
-        <p:txBody>
-          <a:bodyPr wrap="square">
-            <a:spAutoFit/>
-          </a:bodyPr>
-          <a:lstStyle/>
-          <a:p>
-            <a:pPr algn="l">
-              <a:spcAft>
-                <a:spcPts val="600"/>
-              </a:spcAft>
-            </a:pPr>
-            <a:r>
-              <a:rPr sz="2800" b="1" i="0">
-                <a:solidFill>
-                  <a:srgbClr val="2C5F2D"/>
-                </a:solidFill>
-                <a:latin typeface="Cambria"/>
-              </a:rPr>
-              <a:t>Closing the Container + Aaronic Blessing</a:t>
-            </a:r>
-          </a:p>
-        </p:txBody>
-      </p:sp>
-      <p:sp>
-        <p:nvSpPr>
-          <p:cNvPr id="4" name="TextBox 4"/>
-          <p:cNvSpPr txBox="1"/>
-          <p:nvPr/>
-        </p:nvSpPr>
-        <p:spPr>
-          <a:xfrm>
-            <a:off x="822960" y="1600200"/>
-            <a:ext cx="5669280" cy="4572000"/>
-          </a:xfrm>
-          <a:prstGeom prst="rect">
-            <a:avLst/>
-          </a:prstGeom>
-          <a:noFill/>
-        </p:spPr>
-        <p:txBody>
-          <a:bodyPr wrap="square" lIns="91440" tIns="91440" rIns="91440" bIns="91440"/>
-          <a:lstStyle/>
-          <a:p>
-            <a:pPr marL="274320" indent="-274320">
-              <a:spcAft>
-                <a:spcPts val="900"/>
-              </a:spcAft>
-            </a:pPr>
-            <a:r>
-              <a:rPr sz="2200" b="1" i="0">
-                <a:solidFill>
-                  <a:srgbClr val="97BC62"/>
-                </a:solidFill>
-                <a:latin typeface="Calibri"/>
-              </a:rPr>
-              <a:t>•  </a:t>
-            </a:r>
-            <a:r>
-              <a:rPr sz="2200" b="0" i="0">
-                <a:solidFill>
-                  <a:srgbClr val="222B22"/>
-                </a:solidFill>
-                <a:latin typeface="Calibri"/>
-              </a:rPr>
-              <a:t>We close the way we opened — the container, six steps:</a:t>
-            </a:r>
-          </a:p>
-          <a:p>
-            <a:pPr marL="685800" indent="-274320">
-              <a:spcAft>
-                <a:spcPts val="700"/>
-              </a:spcAft>
-            </a:pPr>
-            <a:r>
-              <a:rPr sz="2000" b="1" i="0">
-                <a:solidFill>
-                  <a:srgbClr val="97BC62"/>
-                </a:solidFill>
-                <a:latin typeface="Calibri"/>
-              </a:rPr>
-              <a:t>1   </a:t>
-            </a:r>
-            <a:r>
-              <a:rPr sz="2000" b="0" i="0">
-                <a:solidFill>
-                  <a:srgbClr val="222B22"/>
-                </a:solidFill>
-                <a:latin typeface="Calibri"/>
-              </a:rPr>
-              <a:t>Stand again — same circle, same posture as the open</a:t>
-            </a:r>
-          </a:p>
-          <a:p>
-            <a:pPr marL="685800" indent="-274320">
-              <a:spcAft>
-                <a:spcPts val="700"/>
-              </a:spcAft>
-            </a:pPr>
-            <a:r>
-              <a:rPr sz="2000" b="1" i="0">
-                <a:solidFill>
-                  <a:srgbClr val="97BC62"/>
-                </a:solidFill>
-                <a:latin typeface="Calibri"/>
-              </a:rPr>
-              <a:t>2   </a:t>
-            </a:r>
-            <a:r>
-              <a:rPr sz="2000" b="0" i="0">
-                <a:solidFill>
-                  <a:srgbClr val="222B22"/>
-                </a:solidFill>
-                <a:latin typeface="Calibri"/>
-              </a:rPr>
-              <a:t>One-word landing — compare it to your opening word</a:t>
-            </a:r>
-          </a:p>
-          <a:p>
-            <a:pPr marL="685800" indent="-274320">
-              <a:spcAft>
-                <a:spcPts val="700"/>
-              </a:spcAft>
-            </a:pPr>
-            <a:r>
-              <a:rPr sz="2000" b="1" i="0">
-                <a:solidFill>
-                  <a:srgbClr val="97BC62"/>
-                </a:solidFill>
-                <a:latin typeface="Calibri"/>
-              </a:rPr>
-              <a:t>3   </a:t>
-            </a:r>
-            <a:r>
-              <a:rPr sz="2000" b="0" i="0">
-                <a:solidFill>
-                  <a:srgbClr val="222B22"/>
-                </a:solidFill>
-                <a:latin typeface="Calibri"/>
-              </a:rPr>
-              <a:t>The one thing you are taking from tonight</a:t>
-            </a:r>
-          </a:p>
-          <a:p>
-            <a:pPr marL="685800" indent="-274320">
-              <a:spcAft>
-                <a:spcPts val="700"/>
-              </a:spcAft>
-            </a:pPr>
-            <a:r>
-              <a:rPr sz="2000" b="1" i="0">
-                <a:solidFill>
-                  <a:srgbClr val="97BC62"/>
-                </a:solidFill>
-                <a:latin typeface="Calibri"/>
-              </a:rPr>
-              <a:t>4   </a:t>
-            </a:r>
-            <a:r>
-              <a:rPr sz="2000" b="0" i="0">
-                <a:solidFill>
-                  <a:srgbClr val="222B22"/>
-                </a:solidFill>
-                <a:latin typeface="Calibri"/>
-              </a:rPr>
-              <a:t>The one practice — committed aloud, or modified to one you will actually keep</a:t>
-            </a:r>
-          </a:p>
-          <a:p>
-            <a:pPr marL="685800" indent="-274320">
-              <a:spcAft>
-                <a:spcPts val="700"/>
-              </a:spcAft>
-            </a:pPr>
-            <a:r>
-              <a:rPr sz="2000" b="1" i="0">
-                <a:solidFill>
-                  <a:srgbClr val="97BC62"/>
-                </a:solidFill>
-                <a:latin typeface="Calibri"/>
-              </a:rPr>
-              <a:t>5   </a:t>
-            </a:r>
-            <a:r>
-              <a:rPr sz="2000" b="0" i="0">
-                <a:solidFill>
-                  <a:srgbClr val="222B22"/>
-                </a:solidFill>
-                <a:latin typeface="Calibri"/>
-              </a:rPr>
-              <a:t>Blessings — specific, witnessed, short</a:t>
-            </a:r>
-          </a:p>
-          <a:p>
-            <a:pPr marL="685800" indent="-274320">
-              <a:spcAft>
-                <a:spcPts val="700"/>
-              </a:spcAft>
-            </a:pPr>
-            <a:r>
-              <a:rPr sz="2000" b="1" i="0">
-                <a:solidFill>
-                  <a:srgbClr val="97BC62"/>
-                </a:solidFill>
-                <a:latin typeface="Calibri"/>
-              </a:rPr>
-              <a:t>6   </a:t>
-            </a:r>
-            <a:r>
-              <a:rPr sz="2000" b="0" i="0">
-                <a:solidFill>
-                  <a:srgbClr val="222B22"/>
-                </a:solidFill>
-                <a:latin typeface="Calibri"/>
-              </a:rPr>
-              <a:t>Closing prayer — and the Aaronic blessing, spoken over each other, face to face</a:t>
-            </a:r>
-          </a:p>
-        </p:txBody>
-      </p:sp>
-      <p:sp>
-        <p:nvSpPr>
-          <p:cNvPr id="6" name="TextBox 6"/>
-          <p:cNvSpPr txBox="1"/>
-          <p:nvPr/>
-        </p:nvSpPr>
-        <p:spPr>
-          <a:xfrm>
-            <a:off x="6766560" y="1737360"/>
-            <a:ext cx="4663440" cy="2926080"/>
-          </a:xfrm>
-          <a:prstGeom prst="rect">
-            <a:avLst/>
-          </a:prstGeom>
-          <a:solidFill>
-            <a:srgbClr val="F1F6EC"/>
-          </a:solidFill>
-        </p:spPr>
-        <p:txBody>
-          <a:bodyPr wrap="square" lIns="91440" tIns="91440" rIns="91440" bIns="91440" anchor="ctr"/>
-          <a:lstStyle/>
-          <a:p>
-            <a:pPr>
-              <a:spcAft>
-                <a:spcPts val="900"/>
-              </a:spcAft>
-            </a:pPr>
-            <a:r>
-              <a:rPr sz="1200" b="1" i="0">
-                <a:solidFill>
-                  <a:srgbClr val="97BC62"/>
-                </a:solidFill>
-                <a:latin typeface="Calibri"/>
-              </a:rPr>
-              <a:t>THE AARONIC BLESSING — NUMBERS 6:24–26</a:t>
-            </a:r>
-          </a:p>
-          <a:p>
-            <a:pPr>
-              <a:spcAft>
-                <a:spcPts val="600"/>
-              </a:spcAft>
-            </a:pPr>
-            <a:r>
-              <a:rPr sz="2400" b="0" i="1">
-                <a:solidFill>
-                  <a:srgbClr val="222B22"/>
-                </a:solidFill>
-                <a:latin typeface="Cambria"/>
-              </a:rPr>
-              <a:t>“The Lord bless you and keep you;</a:t>
-            </a:r>
-          </a:p>
-          <a:p>
-            <a:pPr>
-              <a:spcAft>
-                <a:spcPts val="600"/>
-              </a:spcAft>
-            </a:pPr>
-            <a:r>
-              <a:rPr sz="2400" b="0" i="1">
-                <a:solidFill>
-                  <a:srgbClr val="222B22"/>
-                </a:solidFill>
-                <a:latin typeface="Cambria"/>
-              </a:rPr>
-              <a:t>the Lord make his face to shine upon you, and be gracious to you;</a:t>
-            </a:r>
-          </a:p>
-          <a:p>
-            <a:pPr>
-              <a:spcAft>
-                <a:spcPts val="600"/>
-              </a:spcAft>
-            </a:pPr>
-            <a:r>
-              <a:rPr sz="2400" b="0" i="1">
-                <a:solidFill>
-                  <a:srgbClr val="222B22"/>
-                </a:solidFill>
-                <a:latin typeface="Cambria"/>
-              </a:rPr>
-              <a:t>the Lord lift up his countenance upon you, and give you peace.”</a:t>
-            </a:r>
-          </a:p>
-        </p:txBody>
-      </p:sp>
-      <p:sp>
-        <p:nvSpPr>
-          <p:cNvPr id="90" name="SlideNum"/>
-          <p:cNvSpPr txBox="1"/>
-          <p:nvPr/>
-        </p:nvSpPr>
-        <p:spPr>
-          <a:xfrm>
-            <a:off x="11384280" y="6446520"/>
-            <a:ext cx="640080" cy="292608"/>
-          </a:xfrm>
-          <a:prstGeom prst="rect">
-            <a:avLst/>
-          </a:prstGeom>
-          <a:noFill/>
-        </p:spPr>
-        <p:txBody>
-          <a:bodyPr wrap="none" lIns="0" tIns="0" rIns="45720" bIns="0" anchor="ctr"/>
-          <a:lstStyle/>
-          <a:p>
-            <a:pPr algn="r"/>
-            <a:r>
-              <a:t>218</a:t>
-            </a:r>
-            <a:endParaRPr sz="1000" b="1">
-              <a:solidFill>
-                <a:srgbClr val="7A8A6E"/>
-              </a:solidFill>
-              <a:latin typeface="Calibri"/>
-            </a:endParaRPr>
-          </a:p>
-        </p:txBody>
-      </p:sp>
-    </p:spTree>
-  </p:cSld>
-  <p:clrMapOvr>
-    <a:masterClrMapping/>
-  </p:clrMapOvr>
-</p:sld>
-</file>
-
-<file path=ppt/slides/slide219.xml><?xml version="1.0" encoding="utf-8"?>
-<p:sld xmlns:a="http://schemas.openxmlformats.org/drawingml/2006/main" xmlns:r="http://schemas.openxmlformats.org/officeDocument/2006/relationships" xmlns:p="http://schemas.openxmlformats.org/presentationml/2006/main">
-  <p:cSld>
-    <p:spTree>
-      <p:nvGrpSpPr>
-        <p:cNvPr id="1" name=""/>
-        <p:cNvGrpSpPr/>
-        <p:nvPr/>
-      </p:nvGrpSpPr>
-      <p:grpSpPr>
-        <a:xfrm>
-          <a:off x="0" y="0"/>
-          <a:ext cx="0" cy="0"/>
-          <a:chOff x="0" y="0"/>
-          <a:chExt cx="0" cy="0"/>
-        </a:xfrm>
-      </p:grpSpPr>
-      <p:sp>
-        <p:nvSpPr>
-          <p:cNvPr id="2" name="Rectangle 1"/>
-          <p:cNvSpPr/>
-          <p:nvPr/>
-        </p:nvSpPr>
-        <p:spPr>
-          <a:xfrm>
-            <a:off x="0" y="0"/>
-            <a:ext cx="12191695" cy="6858000"/>
-          </a:xfrm>
-          <a:prstGeom prst="rect">
-            <a:avLst/>
-          </a:prstGeom>
-          <a:solidFill>
-            <a:srgbClr val="2C5F2D"/>
-          </a:solidFill>
-          <a:ln>
-            <a:noFill/>
-          </a:ln>
-          <a:effectLst/>
-        </p:spPr>
-        <p:style>
-          <a:lnRef idx="1">
-            <a:schemeClr val="accent1"/>
-          </a:lnRef>
-          <a:fillRef idx="3">
-            <a:schemeClr val="accent1"/>
-          </a:fillRef>
-          <a:effectRef idx="2">
-            <a:schemeClr val="accent1"/>
-          </a:effectRef>
-          <a:fontRef idx="minor">
-            <a:schemeClr val="lt1"/>
-          </a:fontRef>
-        </p:style>
-        <p:txBody>
-          <a:bodyPr rtlCol="0" anchor="ctr"/>
-          <a:lstStyle/>
-          <a:p>
-            <a:pPr algn="ctr"/>
-            <a:endParaRPr/>
-          </a:p>
-        </p:txBody>
-      </p:sp>
-      <p:sp>
-        <p:nvSpPr>
-          <p:cNvPr id="3" name="TextBox 2"/>
-          <p:cNvSpPr txBox="1"/>
-          <p:nvPr/>
-        </p:nvSpPr>
-        <p:spPr>
-          <a:xfrm>
-            <a:off x="1097280" y="2286000"/>
-            <a:ext cx="9966960" cy="2194560"/>
-          </a:xfrm>
-          <a:prstGeom prst="rect">
-            <a:avLst/>
-          </a:prstGeom>
-          <a:noFill/>
-        </p:spPr>
-        <p:txBody>
-          <a:bodyPr wrap="square">
-            <a:spAutoFit/>
-          </a:bodyPr>
-          <a:lstStyle/>
-          <a:p>
-            <a:pPr algn="l">
-              <a:spcAft>
-                <a:spcPts val="600"/>
-              </a:spcAft>
-            </a:pPr>
-            <a:r>
-              <a:rPr sz="1800" b="1" i="0">
-                <a:solidFill>
-                  <a:srgbClr val="97BC62"/>
-                </a:solidFill>
-                <a:latin typeface="Calibri"/>
-              </a:rPr>
-              <a:t>Quarter 4</a:t>
-            </a:r>
-          </a:p>
-          <a:p>
-            <a:pPr algn="l">
-              <a:spcAft>
-                <a:spcPts val="600"/>
-              </a:spcAft>
-            </a:pPr>
-            <a:r>
-              <a:rPr sz="4000" b="1" i="0">
-                <a:solidFill>
-                  <a:srgbClr val="FFFFFF"/>
-                </a:solidFill>
-                <a:latin typeface="Cambria"/>
-              </a:rPr>
-              <a:t>Consolidation &amp; Sending</a:t>
-            </a:r>
-          </a:p>
-          <a:p>
-            <a:pPr algn="l">
-              <a:spcAft>
-                <a:spcPts val="600"/>
-              </a:spcAft>
-            </a:pPr>
-            <a:r>
-              <a:rPr sz="1800" b="0" i="1">
-                <a:solidFill>
-                  <a:srgbClr val="E4EFDA"/>
-                </a:solidFill>
-                <a:latin typeface="Calibri"/>
-              </a:rPr>
-              <a:t>Weeks 18–22  ·  Five Wednesdays · the mercy cards, The Long Walk, two commissionings</a:t>
-            </a:r>
-          </a:p>
-        </p:txBody>
-      </p:sp>
-      <p:sp>
-        <p:nvSpPr>
-          <p:cNvPr id="90" name="SlideNum"/>
-          <p:cNvSpPr txBox="1"/>
-          <p:nvPr/>
-        </p:nvSpPr>
-        <p:spPr>
-          <a:xfrm>
-            <a:off x="11384280" y="6446520"/>
-            <a:ext cx="640080" cy="292608"/>
-          </a:xfrm>
-          <a:prstGeom prst="rect">
-            <a:avLst/>
-          </a:prstGeom>
-          <a:noFill/>
-        </p:spPr>
-        <p:txBody>
-          <a:bodyPr wrap="none" lIns="0" tIns="0" rIns="45720" bIns="0" anchor="ctr"/>
-          <a:lstStyle/>
-          <a:p>
-            <a:pPr algn="r"/>
-            <a:r>
-              <a:t>219</a:t>
-            </a:r>
-            <a:endParaRPr sz="1000" b="1">
-              <a:solidFill>
-                <a:srgbClr val="F1F6EC"/>
-              </a:solidFill>
-              <a:latin typeface="Calibri"/>
-            </a:endParaRPr>
-          </a:p>
-        </p:txBody>
-      </p:sp>
     </p:spTree>
   </p:cSld>
   <p:clrMapOvr>

--- a/_implementation-notes/evening-series/FotH Evening Session 17 Slides DRAFT v1.pptx
+++ b/_implementation-notes/evening-series/FotH Evening Session 17 Slides DRAFT v1.pptx
@@ -4733,6 +4733,390 @@
 </file>
 
 <file path=ppt/slides/slide10.xml><?xml version="1.0" encoding="utf-8"?>
+<p:sld xmlns:a="http://schemas.openxmlformats.org/drawingml/2006/main" xmlns:p="http://schemas.openxmlformats.org/presentationml/2006/main" xmlns:r="http://schemas.openxmlformats.org/officeDocument/2006/relationships">
+  <p:cSld>
+    <p:spTree>
+      <p:nvGrpSpPr>
+        <p:cNvPr id="1" name=""/>
+        <p:cNvGrpSpPr/>
+        <p:nvPr/>
+      </p:nvGrpSpPr>
+      <p:grpSpPr/>
+      <p:sp>
+        <p:nvSpPr>
+          <p:cNvPr id="2" name="Rectangle 1"/>
+          <p:cNvSpPr/>
+          <p:nvPr/>
+        </p:nvSpPr>
+        <p:spPr>
+          <a:xfrm>
+            <a:off x="0" y="0"/>
+            <a:ext cx="12192000" cy="6858000"/>
+          </a:xfrm>
+          <a:prstGeom prst="rect">
+            <a:avLst/>
+          </a:prstGeom>
+          <a:solidFill>
+            <a:srgbClr val="FFFFFF"/>
+          </a:solidFill>
+          <a:ln>
+            <a:noFill/>
+          </a:ln>
+          <a:effectLst/>
+        </p:spPr>
+        <p:style>
+          <a:lnRef idx="1">
+            <a:schemeClr val="accent1"/>
+          </a:lnRef>
+          <a:fillRef idx="3">
+            <a:schemeClr val="accent1"/>
+          </a:fillRef>
+          <a:effectRef idx="2">
+            <a:schemeClr val="accent1"/>
+          </a:effectRef>
+          <a:fontRef idx="minor">
+            <a:schemeClr val="lt1"/>
+          </a:fontRef>
+        </p:style>
+        <p:txBody>
+          <a:bodyPr rtlCol="0" anchor="ctr"/>
+          <a:lstStyle/>
+          <a:p>
+            <a:pPr algn="ctr"/>
+          </a:p>
+        </p:txBody>
+      </p:sp>
+      <p:sp>
+        <p:nvSpPr>
+          <p:cNvPr id="3" name="TextBox 2"/>
+          <p:cNvSpPr txBox="1"/>
+          <p:nvPr/>
+        </p:nvSpPr>
+        <p:spPr>
+          <a:xfrm>
+            <a:off x="822960" y="502920"/>
+            <a:ext cx="10515600" cy="822960"/>
+          </a:xfrm>
+          <a:prstGeom prst="rect">
+            <a:avLst/>
+          </a:prstGeom>
+          <a:noFill/>
+        </p:spPr>
+        <p:txBody>
+          <a:bodyPr wrap="square">
+            <a:spAutoFit/>
+          </a:bodyPr>
+          <a:lstStyle/>
+          <a:p>
+            <a:r>
+              <a:rPr sz="2800" b="1">
+                <a:solidFill>
+                  <a:srgbClr val="2C5F2D"/>
+                </a:solidFill>
+                <a:latin typeface="Cambria"/>
+              </a:rPr>
+              <a:t>The Take-Home Sheet — the Daily Rhythm</a:t>
+            </a:r>
+          </a:p>
+        </p:txBody>
+      </p:sp>
+      <p:pic>
+        <p:nvPicPr>
+          <p:cNvPr id="4" name="Picture 3" descr="s17_part1.png"/>
+          <p:cNvPicPr>
+            <a:picLocks noChangeAspect="1"/>
+          </p:cNvPicPr>
+          <p:nvPr/>
+        </p:nvPicPr>
+        <p:blipFill>
+          <a:blip r:embed="rId2"/>
+          <a:stretch>
+            <a:fillRect/>
+          </a:stretch>
+        </p:blipFill>
+        <p:spPr>
+          <a:xfrm>
+            <a:off x="1798167" y="1463040"/>
+            <a:ext cx="8595360" cy="4039819"/>
+          </a:xfrm>
+          <a:prstGeom prst="rect">
+            <a:avLst/>
+          </a:prstGeom>
+          <a:ln w="12700">
+            <a:solidFill>
+              <a:srgbClr val="C8C8C8"/>
+            </a:solidFill>
+          </a:ln>
+        </p:spPr>
+      </p:pic>
+      <p:sp>
+        <p:nvSpPr>
+          <p:cNvPr id="5" name="TextBox 4"/>
+          <p:cNvSpPr txBox="1"/>
+          <p:nvPr/>
+        </p:nvSpPr>
+        <p:spPr>
+          <a:xfrm>
+            <a:off x="822960" y="6355080"/>
+            <a:ext cx="10515600" cy="411480"/>
+          </a:xfrm>
+          <a:prstGeom prst="rect">
+            <a:avLst/>
+          </a:prstGeom>
+          <a:noFill/>
+        </p:spPr>
+        <p:txBody>
+          <a:bodyPr wrap="square">
+            <a:spAutoFit/>
+          </a:bodyPr>
+          <a:lstStyle/>
+          <a:p>
+            <a:r>
+              <a:rPr sz="1400" i="1">
+                <a:solidFill>
+                  <a:srgbClr val="595959"/>
+                </a:solidFill>
+                <a:latin typeface="Calibri"/>
+              </a:rPr>
+              <a:t>Handed out now — this is the sheet in your hands.</a:t>
+            </a:r>
+          </a:p>
+        </p:txBody>
+      </p:sp>
+      <p:sp>
+        <p:nvSpPr>
+          <p:cNvPr id="90" name="SlideNum"/>
+          <p:cNvSpPr txBox="1"/>
+          <p:nvPr/>
+        </p:nvSpPr>
+        <p:spPr>
+          <a:xfrm>
+            <a:off x="11384280" y="6446520"/>
+            <a:ext cx="640080" cy="292608"/>
+          </a:xfrm>
+          <a:prstGeom prst="rect">
+            <a:avLst/>
+          </a:prstGeom>
+          <a:noFill/>
+        </p:spPr>
+        <p:txBody>
+          <a:bodyPr wrap="none" lIns="0" tIns="0" rIns="45720" bIns="0" anchor="ctr"/>
+          <a:lstStyle/>
+          <a:p>
+            <a:pPr algn="r"/>
+            <a:r>
+              <a:t>216</a:t>
+            </a:r>
+            <a:endParaRPr sz="1000" b="1">
+              <a:solidFill>
+                <a:srgbClr val="7A8A6E"/>
+              </a:solidFill>
+              <a:latin typeface="Calibri"/>
+            </a:endParaRPr>
+          </a:p>
+        </p:txBody>
+      </p:sp>
+    </p:spTree>
+  </p:cSld>
+  <p:clrMapOvr>
+    <a:masterClrMapping/>
+  </p:clrMapOvr>
+</p:sld>
+</file>
+
+<file path=ppt/slides/slide11.xml><?xml version="1.0" encoding="utf-8"?>
+<p:sld xmlns:a="http://schemas.openxmlformats.org/drawingml/2006/main" xmlns:p="http://schemas.openxmlformats.org/presentationml/2006/main" xmlns:r="http://schemas.openxmlformats.org/officeDocument/2006/relationships">
+  <p:cSld>
+    <p:spTree>
+      <p:nvGrpSpPr>
+        <p:cNvPr id="1" name=""/>
+        <p:cNvGrpSpPr/>
+        <p:nvPr/>
+      </p:nvGrpSpPr>
+      <p:grpSpPr/>
+      <p:sp>
+        <p:nvSpPr>
+          <p:cNvPr id="2" name="Rectangle 1"/>
+          <p:cNvSpPr/>
+          <p:nvPr/>
+        </p:nvSpPr>
+        <p:spPr>
+          <a:xfrm>
+            <a:off x="0" y="0"/>
+            <a:ext cx="12192000" cy="6858000"/>
+          </a:xfrm>
+          <a:prstGeom prst="rect">
+            <a:avLst/>
+          </a:prstGeom>
+          <a:solidFill>
+            <a:srgbClr val="FFFFFF"/>
+          </a:solidFill>
+          <a:ln>
+            <a:noFill/>
+          </a:ln>
+          <a:effectLst/>
+        </p:spPr>
+        <p:style>
+          <a:lnRef idx="1">
+            <a:schemeClr val="accent1"/>
+          </a:lnRef>
+          <a:fillRef idx="3">
+            <a:schemeClr val="accent1"/>
+          </a:fillRef>
+          <a:effectRef idx="2">
+            <a:schemeClr val="accent1"/>
+          </a:effectRef>
+          <a:fontRef idx="minor">
+            <a:schemeClr val="lt1"/>
+          </a:fontRef>
+        </p:style>
+        <p:txBody>
+          <a:bodyPr rtlCol="0" anchor="ctr"/>
+          <a:lstStyle/>
+          <a:p>
+            <a:pPr algn="ctr"/>
+          </a:p>
+        </p:txBody>
+      </p:sp>
+      <p:sp>
+        <p:nvSpPr>
+          <p:cNvPr id="3" name="TextBox 2"/>
+          <p:cNvSpPr txBox="1"/>
+          <p:nvPr/>
+        </p:nvSpPr>
+        <p:spPr>
+          <a:xfrm>
+            <a:off x="822960" y="502920"/>
+            <a:ext cx="10515600" cy="822960"/>
+          </a:xfrm>
+          <a:prstGeom prst="rect">
+            <a:avLst/>
+          </a:prstGeom>
+          <a:noFill/>
+        </p:spPr>
+        <p:txBody>
+          <a:bodyPr wrap="square">
+            <a:spAutoFit/>
+          </a:bodyPr>
+          <a:lstStyle/>
+          <a:p>
+            <a:r>
+              <a:rPr sz="2800" b="1">
+                <a:solidFill>
+                  <a:srgbClr val="2C5F2D"/>
+                </a:solidFill>
+                <a:latin typeface="Cambria"/>
+              </a:rPr>
+              <a:t>The Take-Home Sheet — the Four Parts</a:t>
+            </a:r>
+          </a:p>
+        </p:txBody>
+      </p:sp>
+      <p:pic>
+        <p:nvPicPr>
+          <p:cNvPr id="4" name="Picture 3" descr="s17_part2.png"/>
+          <p:cNvPicPr>
+            <a:picLocks noChangeAspect="1"/>
+          </p:cNvPicPr>
+          <p:nvPr/>
+        </p:nvPicPr>
+        <p:blipFill>
+          <a:blip r:embed="rId2"/>
+          <a:stretch>
+            <a:fillRect/>
+          </a:stretch>
+        </p:blipFill>
+        <p:spPr>
+          <a:xfrm>
+            <a:off x="2258348" y="1463040"/>
+            <a:ext cx="7674998" cy="4709159"/>
+          </a:xfrm>
+          <a:prstGeom prst="rect">
+            <a:avLst/>
+          </a:prstGeom>
+          <a:ln w="12700">
+            <a:solidFill>
+              <a:srgbClr val="C8C8C8"/>
+            </a:solidFill>
+          </a:ln>
+        </p:spPr>
+      </p:pic>
+      <p:sp>
+        <p:nvSpPr>
+          <p:cNvPr id="5" name="TextBox 4"/>
+          <p:cNvSpPr txBox="1"/>
+          <p:nvPr/>
+        </p:nvSpPr>
+        <p:spPr>
+          <a:xfrm>
+            <a:off x="822960" y="6355080"/>
+            <a:ext cx="10515600" cy="411480"/>
+          </a:xfrm>
+          <a:prstGeom prst="rect">
+            <a:avLst/>
+          </a:prstGeom>
+          <a:noFill/>
+        </p:spPr>
+        <p:txBody>
+          <a:bodyPr wrap="square">
+            <a:spAutoFit/>
+          </a:bodyPr>
+          <a:lstStyle/>
+          <a:p>
+            <a:r>
+              <a:rPr sz="1400" i="1">
+                <a:solidFill>
+                  <a:srgbClr val="595959"/>
+                </a:solidFill>
+                <a:latin typeface="Calibri"/>
+              </a:rPr>
+              <a:t>One practice at a time — and a partner expecting you at the end of week one.</a:t>
+            </a:r>
+          </a:p>
+        </p:txBody>
+      </p:sp>
+      <p:sp>
+        <p:nvSpPr>
+          <p:cNvPr id="90" name="SlideNum"/>
+          <p:cNvSpPr txBox="1"/>
+          <p:nvPr/>
+        </p:nvSpPr>
+        <p:spPr>
+          <a:xfrm>
+            <a:off x="11384280" y="6446520"/>
+            <a:ext cx="640080" cy="292608"/>
+          </a:xfrm>
+          <a:prstGeom prst="rect">
+            <a:avLst/>
+          </a:prstGeom>
+          <a:noFill/>
+        </p:spPr>
+        <p:txBody>
+          <a:bodyPr wrap="none" lIns="0" tIns="0" rIns="45720" bIns="0" anchor="ctr"/>
+          <a:lstStyle/>
+          <a:p>
+            <a:pPr algn="r"/>
+            <a:r>
+              <a:t>216a</a:t>
+            </a:r>
+            <a:endParaRPr sz="1000" b="1">
+              <a:solidFill>
+                <a:srgbClr val="7A8A6E"/>
+              </a:solidFill>
+              <a:latin typeface="Calibri"/>
+            </a:endParaRPr>
+          </a:p>
+        </p:txBody>
+      </p:sp>
+    </p:spTree>
+  </p:cSld>
+  <p:clrMapOvr>
+    <a:masterClrMapping/>
+  </p:clrMapOvr>
+</p:sld>
+</file>
+
+<file path=ppt/slides/slide12.xml><?xml version="1.0" encoding="utf-8"?>
 <p:sld xmlns:a="http://schemas.openxmlformats.org/drawingml/2006/main" xmlns:r="http://schemas.openxmlformats.org/officeDocument/2006/relationships" xmlns:p="http://schemas.openxmlformats.org/presentationml/2006/main">
   <p:cSld>
     <p:spTree>
@@ -5065,7 +5449,7 @@
 </p:sld>
 </file>
 
-<file path=ppt/slides/slide11.xml><?xml version="1.0" encoding="utf-8"?>
+<file path=ppt/slides/slide13.xml><?xml version="1.0" encoding="utf-8"?>
 <p:sld xmlns:a="http://schemas.openxmlformats.org/drawingml/2006/main" xmlns:r="http://schemas.openxmlformats.org/officeDocument/2006/relationships" xmlns:p="http://schemas.openxmlformats.org/presentationml/2006/main">
   <p:cSld>
     <p:spTree>
@@ -5474,7 +5858,7 @@
 </p:sld>
 </file>
 
-<file path=ppt/slides/slide12.xml><?xml version="1.0" encoding="utf-8"?>
+<file path=ppt/slides/slide14.xml><?xml version="1.0" encoding="utf-8"?>
 <p:sld xmlns:a="http://schemas.openxmlformats.org/drawingml/2006/main" xmlns:r="http://schemas.openxmlformats.org/officeDocument/2006/relationships" xmlns:p="http://schemas.openxmlformats.org/presentationml/2006/main">
   <p:cSld>
     <p:spTree>
@@ -5634,595 +6018,6 @@
             <a:endParaRPr sz="1000" b="1">
               <a:solidFill>
                 <a:srgbClr val="F1F6EC"/>
-              </a:solidFill>
-              <a:latin typeface="Calibri"/>
-            </a:endParaRPr>
-          </a:p>
-        </p:txBody>
-      </p:sp>
-    </p:spTree>
-  </p:cSld>
-  <p:clrMapOvr>
-    <a:masterClrMapping/>
-  </p:clrMapOvr>
-</p:sld>
-</file>
-
-<file path=ppt/slides/slide13.xml><?xml version="1.0" encoding="utf-8"?>
-<p:sld xmlns:a="http://schemas.openxmlformats.org/drawingml/2006/main" xmlns:p="http://schemas.openxmlformats.org/presentationml/2006/main" xmlns:r="http://schemas.openxmlformats.org/officeDocument/2006/relationships">
-  <p:cSld>
-    <p:spTree>
-      <p:nvGrpSpPr>
-        <p:cNvPr id="1" name=""/>
-        <p:cNvGrpSpPr/>
-        <p:nvPr/>
-      </p:nvGrpSpPr>
-      <p:grpSpPr/>
-      <p:sp>
-        <p:nvSpPr>
-          <p:cNvPr id="2" name="Rectangle 1"/>
-          <p:cNvSpPr/>
-          <p:nvPr/>
-        </p:nvSpPr>
-        <p:spPr>
-          <a:xfrm>
-            <a:off x="0" y="0"/>
-            <a:ext cx="12192000" cy="6858000"/>
-          </a:xfrm>
-          <a:prstGeom prst="rect">
-            <a:avLst/>
-          </a:prstGeom>
-          <a:solidFill>
-            <a:srgbClr val="FFFFFF"/>
-          </a:solidFill>
-          <a:ln>
-            <a:noFill/>
-          </a:ln>
-          <a:effectLst/>
-        </p:spPr>
-        <p:style>
-          <a:lnRef idx="1">
-            <a:schemeClr val="accent1"/>
-          </a:lnRef>
-          <a:fillRef idx="3">
-            <a:schemeClr val="accent1"/>
-          </a:fillRef>
-          <a:effectRef idx="2">
-            <a:schemeClr val="accent1"/>
-          </a:effectRef>
-          <a:fontRef idx="minor">
-            <a:schemeClr val="lt1"/>
-          </a:fontRef>
-        </p:style>
-        <p:txBody>
-          <a:bodyPr rtlCol="0" anchor="ctr"/>
-          <a:lstStyle/>
-          <a:p>
-            <a:pPr algn="ctr"/>
-          </a:p>
-        </p:txBody>
-      </p:sp>
-      <p:sp>
-        <p:nvSpPr>
-          <p:cNvPr id="3" name="TextBox 2"/>
-          <p:cNvSpPr txBox="1"/>
-          <p:nvPr/>
-        </p:nvSpPr>
-        <p:spPr>
-          <a:xfrm>
-            <a:off x="822960" y="502920"/>
-            <a:ext cx="10515600" cy="822960"/>
-          </a:xfrm>
-          <a:prstGeom prst="rect">
-            <a:avLst/>
-          </a:prstGeom>
-          <a:noFill/>
-        </p:spPr>
-        <p:txBody>
-          <a:bodyPr wrap="square">
-            <a:spAutoFit/>
-          </a:bodyPr>
-          <a:lstStyle/>
-          <a:p>
-            <a:r>
-              <a:rPr sz="2800" b="1">
-                <a:solidFill>
-                  <a:srgbClr val="2C5F2D"/>
-                </a:solidFill>
-                <a:latin typeface="Cambria"/>
-              </a:rPr>
-              <a:t>Where We Are — the Four Connects</a:t>
-            </a:r>
-          </a:p>
-        </p:txBody>
-      </p:sp>
-      <p:pic>
-        <p:nvPicPr>
-          <p:cNvPr id="4" name="Picture 3" descr="four-connects.png"/>
-          <p:cNvPicPr>
-            <a:picLocks noChangeAspect="1"/>
-          </p:cNvPicPr>
-          <p:nvPr/>
-        </p:nvPicPr>
-        <p:blipFill>
-          <a:blip r:embed="rId2"/>
-          <a:stretch>
-            <a:fillRect/>
-          </a:stretch>
-        </p:blipFill>
-        <p:spPr>
-          <a:xfrm>
-            <a:off x="932688" y="1645920"/>
-            <a:ext cx="10332720" cy="3708663"/>
-          </a:xfrm>
-          <a:prstGeom prst="rect">
-            <a:avLst/>
-          </a:prstGeom>
-        </p:spPr>
-      </p:pic>
-      <p:sp>
-        <p:nvSpPr>
-          <p:cNvPr id="5" name="TextBox 4"/>
-          <p:cNvSpPr txBox="1"/>
-          <p:nvPr/>
-        </p:nvSpPr>
-        <p:spPr>
-          <a:xfrm>
-            <a:off x="822960" y="5623560"/>
-            <a:ext cx="10515600" cy="914400"/>
-          </a:xfrm>
-          <a:prstGeom prst="rect">
-            <a:avLst/>
-          </a:prstGeom>
-          <a:noFill/>
-        </p:spPr>
-        <p:txBody>
-          <a:bodyPr wrap="square">
-            <a:spAutoFit/>
-          </a:bodyPr>
-          <a:lstStyle/>
-          <a:p>
-            <a:r>
-              <a:rPr sz="1800" b="0">
-                <a:solidFill>
-                  <a:srgbClr val="222B22"/>
-                </a:solidFill>
-                <a:latin typeface="Calibri"/>
-              </a:rPr>
-              <a:t>Session 17 holds the whole map — </a:t>
-            </a:r>
-            <a:r>
-              <a:rPr sz="1800" b="1">
-                <a:solidFill>
-                  <a:srgbClr val="2C5F2D"/>
-                </a:solidFill>
-                <a:latin typeface="Calibri"/>
-              </a:rPr>
-              <a:t>all four Connects</a:t>
-            </a:r>
-            <a:r>
-              <a:rPr sz="1800" b="0">
-                <a:solidFill>
-                  <a:srgbClr val="222B22"/>
-                </a:solidFill>
-                <a:latin typeface="Calibri"/>
-              </a:rPr>
-              <a:t>, wherever the year needs them tonight. Each connection makes the next one real (Matt. 22:37–40).</a:t>
-            </a:r>
-          </a:p>
-        </p:txBody>
-      </p:sp>
-      <p:sp>
-        <p:nvSpPr>
-          <p:cNvPr id="90" name="SlideNum"/>
-          <p:cNvSpPr txBox="1"/>
-          <p:nvPr/>
-        </p:nvSpPr>
-        <p:spPr>
-          <a:xfrm>
-            <a:off x="11384280" y="6446520"/>
-            <a:ext cx="640080" cy="292608"/>
-          </a:xfrm>
-          <a:prstGeom prst="rect">
-            <a:avLst/>
-          </a:prstGeom>
-          <a:noFill/>
-        </p:spPr>
-        <p:txBody>
-          <a:bodyPr wrap="none" lIns="0" tIns="0" rIns="45720" bIns="0" anchor="ctr"/>
-          <a:lstStyle/>
-          <a:p>
-            <a:pPr algn="r"/>
-            <a:r>
-              <a:t>209a</a:t>
-            </a:r>
-            <a:endParaRPr sz="1000" b="1">
-              <a:solidFill>
-                <a:srgbClr val="7A8A6E"/>
-              </a:solidFill>
-              <a:latin typeface="Calibri"/>
-            </a:endParaRPr>
-          </a:p>
-        </p:txBody>
-      </p:sp>
-    </p:spTree>
-  </p:cSld>
-  <p:clrMapOvr>
-    <a:masterClrMapping/>
-  </p:clrMapOvr>
-</p:sld>
-</file>
-
-<file path=ppt/slides/slide14.xml><?xml version="1.0" encoding="utf-8"?>
-<p:sld xmlns:a="http://schemas.openxmlformats.org/drawingml/2006/main" xmlns:p="http://schemas.openxmlformats.org/presentationml/2006/main" xmlns:r="http://schemas.openxmlformats.org/officeDocument/2006/relationships">
-  <p:cSld>
-    <p:spTree>
-      <p:nvGrpSpPr>
-        <p:cNvPr id="1" name=""/>
-        <p:cNvGrpSpPr/>
-        <p:nvPr/>
-      </p:nvGrpSpPr>
-      <p:grpSpPr/>
-      <p:sp>
-        <p:nvSpPr>
-          <p:cNvPr id="2" name="Rectangle 1"/>
-          <p:cNvSpPr/>
-          <p:nvPr/>
-        </p:nvSpPr>
-        <p:spPr>
-          <a:xfrm>
-            <a:off x="0" y="0"/>
-            <a:ext cx="12192000" cy="6858000"/>
-          </a:xfrm>
-          <a:prstGeom prst="rect">
-            <a:avLst/>
-          </a:prstGeom>
-          <a:solidFill>
-            <a:srgbClr val="FFFFFF"/>
-          </a:solidFill>
-          <a:ln>
-            <a:noFill/>
-          </a:ln>
-          <a:effectLst/>
-        </p:spPr>
-        <p:style>
-          <a:lnRef idx="1">
-            <a:schemeClr val="accent1"/>
-          </a:lnRef>
-          <a:fillRef idx="3">
-            <a:schemeClr val="accent1"/>
-          </a:fillRef>
-          <a:effectRef idx="2">
-            <a:schemeClr val="accent1"/>
-          </a:effectRef>
-          <a:fontRef idx="minor">
-            <a:schemeClr val="lt1"/>
-          </a:fontRef>
-        </p:style>
-        <p:txBody>
-          <a:bodyPr rtlCol="0" anchor="ctr"/>
-          <a:lstStyle/>
-          <a:p>
-            <a:pPr algn="ctr"/>
-          </a:p>
-        </p:txBody>
-      </p:sp>
-      <p:sp>
-        <p:nvSpPr>
-          <p:cNvPr id="3" name="TextBox 2"/>
-          <p:cNvSpPr txBox="1"/>
-          <p:nvPr/>
-        </p:nvSpPr>
-        <p:spPr>
-          <a:xfrm>
-            <a:off x="822960" y="502920"/>
-            <a:ext cx="10515600" cy="822960"/>
-          </a:xfrm>
-          <a:prstGeom prst="rect">
-            <a:avLst/>
-          </a:prstGeom>
-          <a:noFill/>
-        </p:spPr>
-        <p:txBody>
-          <a:bodyPr wrap="square">
-            <a:spAutoFit/>
-          </a:bodyPr>
-          <a:lstStyle/>
-          <a:p>
-            <a:r>
-              <a:rPr sz="2800" b="1">
-                <a:solidFill>
-                  <a:srgbClr val="2C5F2D"/>
-                </a:solidFill>
-                <a:latin typeface="Cambria"/>
-              </a:rPr>
-              <a:t>The Take-Home Sheet — the Daily Rhythm</a:t>
-            </a:r>
-          </a:p>
-        </p:txBody>
-      </p:sp>
-      <p:pic>
-        <p:nvPicPr>
-          <p:cNvPr id="4" name="Picture 3" descr="s17_part1.png"/>
-          <p:cNvPicPr>
-            <a:picLocks noChangeAspect="1"/>
-          </p:cNvPicPr>
-          <p:nvPr/>
-        </p:nvPicPr>
-        <p:blipFill>
-          <a:blip r:embed="rId2"/>
-          <a:stretch>
-            <a:fillRect/>
-          </a:stretch>
-        </p:blipFill>
-        <p:spPr>
-          <a:xfrm>
-            <a:off x="1798167" y="1463040"/>
-            <a:ext cx="8595360" cy="4039819"/>
-          </a:xfrm>
-          <a:prstGeom prst="rect">
-            <a:avLst/>
-          </a:prstGeom>
-          <a:ln w="12700">
-            <a:solidFill>
-              <a:srgbClr val="C8C8C8"/>
-            </a:solidFill>
-          </a:ln>
-        </p:spPr>
-      </p:pic>
-      <p:sp>
-        <p:nvSpPr>
-          <p:cNvPr id="5" name="TextBox 4"/>
-          <p:cNvSpPr txBox="1"/>
-          <p:nvPr/>
-        </p:nvSpPr>
-        <p:spPr>
-          <a:xfrm>
-            <a:off x="822960" y="6355080"/>
-            <a:ext cx="10515600" cy="411480"/>
-          </a:xfrm>
-          <a:prstGeom prst="rect">
-            <a:avLst/>
-          </a:prstGeom>
-          <a:noFill/>
-        </p:spPr>
-        <p:txBody>
-          <a:bodyPr wrap="square">
-            <a:spAutoFit/>
-          </a:bodyPr>
-          <a:lstStyle/>
-          <a:p>
-            <a:r>
-              <a:rPr sz="1400" i="1">
-                <a:solidFill>
-                  <a:srgbClr val="595959"/>
-                </a:solidFill>
-                <a:latin typeface="Calibri"/>
-              </a:rPr>
-              <a:t>Handed out now — this is the sheet in your hands.</a:t>
-            </a:r>
-          </a:p>
-        </p:txBody>
-      </p:sp>
-      <p:sp>
-        <p:nvSpPr>
-          <p:cNvPr id="90" name="SlideNum"/>
-          <p:cNvSpPr txBox="1"/>
-          <p:nvPr/>
-        </p:nvSpPr>
-        <p:spPr>
-          <a:xfrm>
-            <a:off x="11384280" y="6446520"/>
-            <a:ext cx="640080" cy="292608"/>
-          </a:xfrm>
-          <a:prstGeom prst="rect">
-            <a:avLst/>
-          </a:prstGeom>
-          <a:noFill/>
-        </p:spPr>
-        <p:txBody>
-          <a:bodyPr wrap="none" lIns="0" tIns="0" rIns="45720" bIns="0" anchor="ctr"/>
-          <a:lstStyle/>
-          <a:p>
-            <a:pPr algn="r"/>
-            <a:r>
-              <a:t>216</a:t>
-            </a:r>
-            <a:endParaRPr sz="1000" b="1">
-              <a:solidFill>
-                <a:srgbClr val="7A8A6E"/>
-              </a:solidFill>
-              <a:latin typeface="Calibri"/>
-            </a:endParaRPr>
-          </a:p>
-        </p:txBody>
-      </p:sp>
-    </p:spTree>
-  </p:cSld>
-  <p:clrMapOvr>
-    <a:masterClrMapping/>
-  </p:clrMapOvr>
-</p:sld>
-</file>
-
-<file path=ppt/slides/slide15.xml><?xml version="1.0" encoding="utf-8"?>
-<p:sld xmlns:a="http://schemas.openxmlformats.org/drawingml/2006/main" xmlns:p="http://schemas.openxmlformats.org/presentationml/2006/main" xmlns:r="http://schemas.openxmlformats.org/officeDocument/2006/relationships">
-  <p:cSld>
-    <p:spTree>
-      <p:nvGrpSpPr>
-        <p:cNvPr id="1" name=""/>
-        <p:cNvGrpSpPr/>
-        <p:nvPr/>
-      </p:nvGrpSpPr>
-      <p:grpSpPr/>
-      <p:sp>
-        <p:nvSpPr>
-          <p:cNvPr id="2" name="Rectangle 1"/>
-          <p:cNvSpPr/>
-          <p:nvPr/>
-        </p:nvSpPr>
-        <p:spPr>
-          <a:xfrm>
-            <a:off x="0" y="0"/>
-            <a:ext cx="12192000" cy="6858000"/>
-          </a:xfrm>
-          <a:prstGeom prst="rect">
-            <a:avLst/>
-          </a:prstGeom>
-          <a:solidFill>
-            <a:srgbClr val="FFFFFF"/>
-          </a:solidFill>
-          <a:ln>
-            <a:noFill/>
-          </a:ln>
-          <a:effectLst/>
-        </p:spPr>
-        <p:style>
-          <a:lnRef idx="1">
-            <a:schemeClr val="accent1"/>
-          </a:lnRef>
-          <a:fillRef idx="3">
-            <a:schemeClr val="accent1"/>
-          </a:fillRef>
-          <a:effectRef idx="2">
-            <a:schemeClr val="accent1"/>
-          </a:effectRef>
-          <a:fontRef idx="minor">
-            <a:schemeClr val="lt1"/>
-          </a:fontRef>
-        </p:style>
-        <p:txBody>
-          <a:bodyPr rtlCol="0" anchor="ctr"/>
-          <a:lstStyle/>
-          <a:p>
-            <a:pPr algn="ctr"/>
-          </a:p>
-        </p:txBody>
-      </p:sp>
-      <p:sp>
-        <p:nvSpPr>
-          <p:cNvPr id="3" name="TextBox 2"/>
-          <p:cNvSpPr txBox="1"/>
-          <p:nvPr/>
-        </p:nvSpPr>
-        <p:spPr>
-          <a:xfrm>
-            <a:off x="822960" y="502920"/>
-            <a:ext cx="10515600" cy="822960"/>
-          </a:xfrm>
-          <a:prstGeom prst="rect">
-            <a:avLst/>
-          </a:prstGeom>
-          <a:noFill/>
-        </p:spPr>
-        <p:txBody>
-          <a:bodyPr wrap="square">
-            <a:spAutoFit/>
-          </a:bodyPr>
-          <a:lstStyle/>
-          <a:p>
-            <a:r>
-              <a:rPr sz="2800" b="1">
-                <a:solidFill>
-                  <a:srgbClr val="2C5F2D"/>
-                </a:solidFill>
-                <a:latin typeface="Cambria"/>
-              </a:rPr>
-              <a:t>The Take-Home Sheet — the Four Parts</a:t>
-            </a:r>
-          </a:p>
-        </p:txBody>
-      </p:sp>
-      <p:pic>
-        <p:nvPicPr>
-          <p:cNvPr id="4" name="Picture 3" descr="s17_part2.png"/>
-          <p:cNvPicPr>
-            <a:picLocks noChangeAspect="1"/>
-          </p:cNvPicPr>
-          <p:nvPr/>
-        </p:nvPicPr>
-        <p:blipFill>
-          <a:blip r:embed="rId2"/>
-          <a:stretch>
-            <a:fillRect/>
-          </a:stretch>
-        </p:blipFill>
-        <p:spPr>
-          <a:xfrm>
-            <a:off x="2258348" y="1463040"/>
-            <a:ext cx="7674998" cy="4709159"/>
-          </a:xfrm>
-          <a:prstGeom prst="rect">
-            <a:avLst/>
-          </a:prstGeom>
-          <a:ln w="12700">
-            <a:solidFill>
-              <a:srgbClr val="C8C8C8"/>
-            </a:solidFill>
-          </a:ln>
-        </p:spPr>
-      </p:pic>
-      <p:sp>
-        <p:nvSpPr>
-          <p:cNvPr id="5" name="TextBox 4"/>
-          <p:cNvSpPr txBox="1"/>
-          <p:nvPr/>
-        </p:nvSpPr>
-        <p:spPr>
-          <a:xfrm>
-            <a:off x="822960" y="6355080"/>
-            <a:ext cx="10515600" cy="411480"/>
-          </a:xfrm>
-          <a:prstGeom prst="rect">
-            <a:avLst/>
-          </a:prstGeom>
-          <a:noFill/>
-        </p:spPr>
-        <p:txBody>
-          <a:bodyPr wrap="square">
-            <a:spAutoFit/>
-          </a:bodyPr>
-          <a:lstStyle/>
-          <a:p>
-            <a:r>
-              <a:rPr sz="1400" i="1">
-                <a:solidFill>
-                  <a:srgbClr val="595959"/>
-                </a:solidFill>
-                <a:latin typeface="Calibri"/>
-              </a:rPr>
-              <a:t>One practice at a time — and a partner expecting you at the end of week one.</a:t>
-            </a:r>
-          </a:p>
-        </p:txBody>
-      </p:sp>
-      <p:sp>
-        <p:nvSpPr>
-          <p:cNvPr id="90" name="SlideNum"/>
-          <p:cNvSpPr txBox="1"/>
-          <p:nvPr/>
-        </p:nvSpPr>
-        <p:spPr>
-          <a:xfrm>
-            <a:off x="11384280" y="6446520"/>
-            <a:ext cx="640080" cy="292608"/>
-          </a:xfrm>
-          <a:prstGeom prst="rect">
-            <a:avLst/>
-          </a:prstGeom>
-          <a:noFill/>
-        </p:spPr>
-        <p:txBody>
-          <a:bodyPr wrap="none" lIns="0" tIns="0" rIns="45720" bIns="0" anchor="ctr"/>
-          <a:lstStyle/>
-          <a:p>
-            <a:pPr algn="r"/>
-            <a:r>
-              <a:t>216a</a:t>
-            </a:r>
-            <a:endParaRPr sz="1000" b="1">
-              <a:solidFill>
-                <a:srgbClr val="7A8A6E"/>
               </a:solidFill>
               <a:latin typeface="Calibri"/>
             </a:endParaRPr>
@@ -6487,6 +6282,211 @@
 </file>
 
 <file path=ppt/slides/slide3.xml><?xml version="1.0" encoding="utf-8"?>
+<p:sld xmlns:a="http://schemas.openxmlformats.org/drawingml/2006/main" xmlns:p="http://schemas.openxmlformats.org/presentationml/2006/main" xmlns:r="http://schemas.openxmlformats.org/officeDocument/2006/relationships">
+  <p:cSld>
+    <p:spTree>
+      <p:nvGrpSpPr>
+        <p:cNvPr id="1" name=""/>
+        <p:cNvGrpSpPr/>
+        <p:nvPr/>
+      </p:nvGrpSpPr>
+      <p:grpSpPr/>
+      <p:sp>
+        <p:nvSpPr>
+          <p:cNvPr id="2" name="Rectangle 1"/>
+          <p:cNvSpPr/>
+          <p:nvPr/>
+        </p:nvSpPr>
+        <p:spPr>
+          <a:xfrm>
+            <a:off x="0" y="0"/>
+            <a:ext cx="12192000" cy="6858000"/>
+          </a:xfrm>
+          <a:prstGeom prst="rect">
+            <a:avLst/>
+          </a:prstGeom>
+          <a:solidFill>
+            <a:srgbClr val="FFFFFF"/>
+          </a:solidFill>
+          <a:ln>
+            <a:noFill/>
+          </a:ln>
+          <a:effectLst/>
+        </p:spPr>
+        <p:style>
+          <a:lnRef idx="1">
+            <a:schemeClr val="accent1"/>
+          </a:lnRef>
+          <a:fillRef idx="3">
+            <a:schemeClr val="accent1"/>
+          </a:fillRef>
+          <a:effectRef idx="2">
+            <a:schemeClr val="accent1"/>
+          </a:effectRef>
+          <a:fontRef idx="minor">
+            <a:schemeClr val="lt1"/>
+          </a:fontRef>
+        </p:style>
+        <p:txBody>
+          <a:bodyPr rtlCol="0" anchor="ctr"/>
+          <a:lstStyle/>
+          <a:p>
+            <a:pPr algn="ctr"/>
+          </a:p>
+        </p:txBody>
+      </p:sp>
+      <p:sp>
+        <p:nvSpPr>
+          <p:cNvPr id="3" name="TextBox 2"/>
+          <p:cNvSpPr txBox="1"/>
+          <p:nvPr/>
+        </p:nvSpPr>
+        <p:spPr>
+          <a:xfrm>
+            <a:off x="822960" y="502920"/>
+            <a:ext cx="10515600" cy="822960"/>
+          </a:xfrm>
+          <a:prstGeom prst="rect">
+            <a:avLst/>
+          </a:prstGeom>
+          <a:noFill/>
+        </p:spPr>
+        <p:txBody>
+          <a:bodyPr wrap="square">
+            <a:spAutoFit/>
+          </a:bodyPr>
+          <a:lstStyle/>
+          <a:p>
+            <a:r>
+              <a:rPr sz="2800" b="1">
+                <a:solidFill>
+                  <a:srgbClr val="2C5F2D"/>
+                </a:solidFill>
+                <a:latin typeface="Cambria"/>
+              </a:rPr>
+              <a:t>Where We Are — the Four Connects</a:t>
+            </a:r>
+          </a:p>
+        </p:txBody>
+      </p:sp>
+      <p:sp>
+        <p:nvSpPr>
+          <p:cNvPr id="5" name="TextBox 4"/>
+          <p:cNvSpPr txBox="1"/>
+          <p:nvPr/>
+        </p:nvSpPr>
+        <p:spPr>
+          <a:xfrm>
+            <a:off x="822960" y="5623560"/>
+            <a:ext cx="10515600" cy="914400"/>
+          </a:xfrm>
+          <a:prstGeom prst="rect">
+            <a:avLst/>
+          </a:prstGeom>
+          <a:noFill/>
+        </p:spPr>
+        <p:txBody>
+          <a:bodyPr wrap="square">
+            <a:spAutoFit/>
+          </a:bodyPr>
+          <a:lstStyle/>
+          <a:p>
+            <a:r>
+              <a:rPr sz="1800" b="0">
+                <a:solidFill>
+                  <a:srgbClr val="222B22"/>
+                </a:solidFill>
+                <a:latin typeface="Calibri"/>
+              </a:rPr>
+              <a:t>Session 17 holds the whole map — </a:t>
+            </a:r>
+            <a:r>
+              <a:rPr sz="1800" b="1">
+                <a:solidFill>
+                  <a:srgbClr val="2C5F2D"/>
+                </a:solidFill>
+                <a:latin typeface="Calibri"/>
+              </a:rPr>
+              <a:t>all four Connects</a:t>
+            </a:r>
+            <a:r>
+              <a:rPr sz="1800" b="0">
+                <a:solidFill>
+                  <a:srgbClr val="222B22"/>
+                </a:solidFill>
+                <a:latin typeface="Calibri"/>
+              </a:rPr>
+              <a:t>, wherever the year needs them tonight. Each connection makes the next one real (Matt. 22:37–40).</a:t>
+            </a:r>
+          </a:p>
+        </p:txBody>
+      </p:sp>
+      <p:sp>
+        <p:nvSpPr>
+          <p:cNvPr id="90" name="SlideNum"/>
+          <p:cNvSpPr txBox="1"/>
+          <p:nvPr/>
+        </p:nvSpPr>
+        <p:spPr>
+          <a:xfrm>
+            <a:off x="11384280" y="6446520"/>
+            <a:ext cx="640080" cy="292608"/>
+          </a:xfrm>
+          <a:prstGeom prst="rect">
+            <a:avLst/>
+          </a:prstGeom>
+          <a:noFill/>
+        </p:spPr>
+        <p:txBody>
+          <a:bodyPr wrap="none" lIns="0" tIns="0" rIns="45720" bIns="0" anchor="ctr"/>
+          <a:lstStyle/>
+          <a:p>
+            <a:pPr algn="r"/>
+            <a:r>
+              <a:t>209a</a:t>
+            </a:r>
+            <a:endParaRPr sz="1000" b="1">
+              <a:solidFill>
+                <a:srgbClr val="7A8A6E"/>
+              </a:solidFill>
+              <a:latin typeface="Calibri"/>
+            </a:endParaRPr>
+          </a:p>
+        </p:txBody>
+      </p:sp>
+      <p:pic>
+        <p:nvPicPr>
+          <p:cNvPr id="91" name="Picture 90" descr="four-connects.png"/>
+          <p:cNvPicPr>
+            <a:picLocks noChangeAspect="1"/>
+          </p:cNvPicPr>
+          <p:nvPr/>
+        </p:nvPicPr>
+        <p:blipFill>
+          <a:blip r:embed="rId4"/>
+          <a:stretch>
+            <a:fillRect/>
+          </a:stretch>
+        </p:blipFill>
+        <p:spPr>
+          <a:xfrm>
+            <a:off x="932688" y="1645920"/>
+            <a:ext cx="10332720" cy="3708663"/>
+          </a:xfrm>
+          <a:prstGeom prst="rect">
+            <a:avLst/>
+          </a:prstGeom>
+        </p:spPr>
+      </p:pic>
+    </p:spTree>
+  </p:cSld>
+  <p:clrMapOvr>
+    <a:masterClrMapping/>
+  </p:clrMapOvr>
+</p:sld>
+</file>
+
+<file path=ppt/slides/slide4.xml><?xml version="1.0" encoding="utf-8"?>
 <p:sld xmlns:a="http://schemas.openxmlformats.org/drawingml/2006/main" xmlns:r="http://schemas.openxmlformats.org/officeDocument/2006/relationships" xmlns:p="http://schemas.openxmlformats.org/presentationml/2006/main">
   <p:cSld>
     <p:spTree>
@@ -6862,308 +6862,6 @@
 </p:sld>
 </file>
 
-<file path=ppt/slides/slide4.xml><?xml version="1.0" encoding="utf-8"?>
-<p:sld xmlns:a="http://schemas.openxmlformats.org/drawingml/2006/main" xmlns:r="http://schemas.openxmlformats.org/officeDocument/2006/relationships" xmlns:p="http://schemas.openxmlformats.org/presentationml/2006/main">
-  <p:cSld>
-    <p:spTree>
-      <p:nvGrpSpPr>
-        <p:cNvPr id="1" name=""/>
-        <p:cNvGrpSpPr/>
-        <p:nvPr/>
-      </p:nvGrpSpPr>
-      <p:grpSpPr>
-        <a:xfrm>
-          <a:off x="0" y="0"/>
-          <a:ext cx="0" cy="0"/>
-          <a:chOff x="0" y="0"/>
-          <a:chExt cx="0" cy="0"/>
-        </a:xfrm>
-      </p:grpSpPr>
-      <p:sp>
-        <p:nvSpPr>
-          <p:cNvPr id="2" name="Rectangle 1"/>
-          <p:cNvSpPr/>
-          <p:nvPr/>
-        </p:nvSpPr>
-        <p:spPr>
-          <a:xfrm>
-            <a:off x="0" y="0"/>
-            <a:ext cx="12191695" cy="6858000"/>
-          </a:xfrm>
-          <a:prstGeom prst="rect">
-            <a:avLst/>
-          </a:prstGeom>
-          <a:solidFill>
-            <a:srgbClr val="FFFFFF"/>
-          </a:solidFill>
-          <a:ln>
-            <a:noFill/>
-          </a:ln>
-        </p:spPr>
-        <p:txBody>
-          <a:bodyPr/>
-          <a:lstStyle/>
-          <a:p>
-            <a:endParaRPr/>
-          </a:p>
-        </p:txBody>
-      </p:sp>
-      <p:sp>
-        <p:nvSpPr>
-          <p:cNvPr id="3" name="TextBox 2"/>
-          <p:cNvSpPr txBox="1"/>
-          <p:nvPr/>
-        </p:nvSpPr>
-        <p:spPr>
-          <a:xfrm>
-            <a:off x="822960" y="502920"/>
-            <a:ext cx="10515600" cy="822960"/>
-          </a:xfrm>
-          <a:prstGeom prst="rect">
-            <a:avLst/>
-          </a:prstGeom>
-          <a:noFill/>
-        </p:spPr>
-        <p:txBody>
-          <a:bodyPr wrap="square">
-            <a:spAutoFit/>
-          </a:bodyPr>
-          <a:lstStyle/>
-          <a:p>
-            <a:pPr algn="l">
-              <a:spcAft>
-                <a:spcPts val="600"/>
-              </a:spcAft>
-            </a:pPr>
-            <a:r>
-              <a:rPr sz="2800" b="1" i="0">
-                <a:solidFill>
-                  <a:srgbClr val="2C5F2D"/>
-                </a:solidFill>
-                <a:latin typeface="Cambria"/>
-              </a:rPr>
-              <a:t>Mode A — The Missed Evening Runs Whole</a:t>
-            </a:r>
-          </a:p>
-        </p:txBody>
-      </p:sp>
-      <p:sp>
-        <p:nvSpPr>
-          <p:cNvPr id="4" name="TextBox 4"/>
-          <p:cNvSpPr txBox="1"/>
-          <p:nvPr/>
-        </p:nvSpPr>
-        <p:spPr>
-          <a:xfrm>
-            <a:off x="822960" y="1600200"/>
-            <a:ext cx="5669280" cy="4572000"/>
-          </a:xfrm>
-          <a:prstGeom prst="rect">
-            <a:avLst/>
-          </a:prstGeom>
-          <a:noFill/>
-        </p:spPr>
-        <p:txBody>
-          <a:bodyPr wrap="square" lIns="91440" tIns="91440" rIns="91440" bIns="91440"/>
-          <a:lstStyle/>
-          <a:p>
-            <a:pPr marL="274320" indent="-274320">
-              <a:spcAft>
-                <a:spcPts val="800"/>
-              </a:spcAft>
-            </a:pPr>
-            <a:r>
-              <a:rPr sz="2200" b="1" i="0">
-                <a:solidFill>
-                  <a:srgbClr val="97BC62"/>
-                </a:solidFill>
-                <a:latin typeface="Calibri"/>
-              </a:rPr>
-              <a:t>•  </a:t>
-            </a:r>
-            <a:r>
-              <a:rPr sz="2200" b="0" i="0">
-                <a:solidFill>
-                  <a:srgbClr val="222B22"/>
-                </a:solidFill>
-                <a:latin typeface="Calibri"/>
-              </a:rPr>
-              <a:t>If the quarter lost an evening — the snow, the assembly, the bug — tonight runs that session's plan, unchanged</a:t>
-            </a:r>
-          </a:p>
-          <a:p>
-            <a:pPr marL="274320" indent="-274320">
-              <a:spcAft>
-                <a:spcPts val="800"/>
-              </a:spcAft>
-            </a:pPr>
-            <a:r>
-              <a:rPr sz="2200" b="1" i="0">
-                <a:solidFill>
-                  <a:srgbClr val="97BC62"/>
-                </a:solidFill>
-                <a:latin typeface="Calibri"/>
-              </a:rPr>
-              <a:t>•  </a:t>
-            </a:r>
-            <a:r>
-              <a:rPr sz="2200" b="0" i="0">
-                <a:solidFill>
-                  <a:srgbClr val="222B22"/>
-                </a:solidFill>
-                <a:latin typeface="Calibri"/>
-              </a:rPr>
-              <a:t>“Tonight is not a make-up class squeezed in. Tonight IS [session name] — whole, unhurried, the evening you were always going to get.”</a:t>
-            </a:r>
-          </a:p>
-          <a:p>
-            <a:pPr marL="274320" indent="-274320">
-              <a:spcAft>
-                <a:spcPts val="800"/>
-              </a:spcAft>
-            </a:pPr>
-            <a:r>
-              <a:rPr sz="2200" b="1" i="0">
-                <a:solidFill>
-                  <a:srgbClr val="97BC62"/>
-                </a:solidFill>
-                <a:latin typeface="Calibri"/>
-              </a:rPr>
-              <a:t>•  </a:t>
-            </a:r>
-            <a:r>
-              <a:rPr sz="2200" b="0" i="0">
-                <a:solidFill>
-                  <a:srgbClr val="222B22"/>
-                </a:solidFill>
-                <a:latin typeface="Calibri"/>
-              </a:rPr>
-              <a:t>“Nothing was skipped this year; it just moved.”</a:t>
-            </a:r>
-          </a:p>
-          <a:p>
-            <a:pPr marL="274320" indent="-274320">
-              <a:spcAft>
-                <a:spcPts val="800"/>
-              </a:spcAft>
-            </a:pPr>
-            <a:r>
-              <a:rPr sz="2200" b="1" i="0">
-                <a:solidFill>
-                  <a:srgbClr val="97BC62"/>
-                </a:solidFill>
-                <a:latin typeface="Calibri"/>
-              </a:rPr>
-              <a:t>•  </a:t>
-            </a:r>
-            <a:r>
-              <a:rPr sz="2200" b="0" i="0">
-                <a:solidFill>
-                  <a:srgbClr val="222B22"/>
-                </a:solidFill>
-                <a:latin typeface="Calibri"/>
-              </a:rPr>
-              <a:t>The lifted plan runs whole — its blocks, its scripts, its splits; only its closing yields to tonight's quarter-close constants</a:t>
-            </a:r>
-          </a:p>
-        </p:txBody>
-      </p:sp>
-      <p:sp>
-        <p:nvSpPr>
-          <p:cNvPr id="6" name="TextBox 6"/>
-          <p:cNvSpPr txBox="1"/>
-          <p:nvPr/>
-        </p:nvSpPr>
-        <p:spPr>
-          <a:xfrm>
-            <a:off x="6766560" y="1737360"/>
-            <a:ext cx="4663440" cy="2194560"/>
-          </a:xfrm>
-          <a:prstGeom prst="rect">
-            <a:avLst/>
-          </a:prstGeom>
-          <a:solidFill>
-            <a:srgbClr val="F1F6EC"/>
-          </a:solidFill>
-        </p:spPr>
-        <p:txBody>
-          <a:bodyPr wrap="square" lIns="91440" tIns="91440" rIns="91440" bIns="91440" anchor="ctr"/>
-          <a:lstStyle/>
-          <a:p>
-            <a:pPr>
-              <a:spcAft>
-                <a:spcPts val="900"/>
-              </a:spcAft>
-            </a:pPr>
-            <a:r>
-              <a:rPr sz="1200" b="1" i="0">
-                <a:solidFill>
-                  <a:srgbClr val="97BC62"/>
-                </a:solidFill>
-                <a:latin typeface="Calibri"/>
-              </a:rPr>
-              <a:t>PROVERBS 16:9 (ESV)</a:t>
-            </a:r>
-          </a:p>
-          <a:p>
-            <a:pPr>
-              <a:spcAft>
-                <a:spcPts val="600"/>
-              </a:spcAft>
-            </a:pPr>
-            <a:r>
-              <a:rPr sz="2400" b="0" i="1">
-                <a:solidFill>
-                  <a:srgbClr val="222B22"/>
-                </a:solidFill>
-                <a:latin typeface="Cambria"/>
-              </a:rPr>
-              <a:t>“The heart of man plans his way, but the LORD establishes his steps.”</a:t>
-            </a:r>
-          </a:p>
-        </p:txBody>
-      </p:sp>
-      <p:sp>
-        <p:nvSpPr>
-          <p:cNvPr id="90" name="SlideNum"/>
-          <p:cNvSpPr txBox="1"/>
-          <p:nvPr/>
-        </p:nvSpPr>
-        <p:spPr>
-          <a:xfrm>
-            <a:off x="11384280" y="6446520"/>
-            <a:ext cx="640080" cy="292608"/>
-          </a:xfrm>
-          <a:prstGeom prst="rect">
-            <a:avLst/>
-          </a:prstGeom>
-          <a:noFill/>
-        </p:spPr>
-        <p:txBody>
-          <a:bodyPr wrap="none" lIns="0" tIns="0" rIns="45720" bIns="0" anchor="ctr"/>
-          <a:lstStyle/>
-          <a:p>
-            <a:pPr algn="r"/>
-            <a:r>
-              <a:t>211</a:t>
-            </a:r>
-            <a:endParaRPr sz="1000" b="1">
-              <a:solidFill>
-                <a:srgbClr val="7A8A6E"/>
-              </a:solidFill>
-              <a:latin typeface="Calibri"/>
-            </a:endParaRPr>
-          </a:p>
-        </p:txBody>
-      </p:sp>
-    </p:spTree>
-  </p:cSld>
-  <p:clrMapOvr>
-    <a:masterClrMapping/>
-  </p:clrMapOvr>
-</p:sld>
-</file>
-
 <file path=ppt/slides/slide5.xml><?xml version="1.0" encoding="utf-8"?>
 <p:sld xmlns:a="http://schemas.openxmlformats.org/drawingml/2006/main" xmlns:r="http://schemas.openxmlformats.org/officeDocument/2006/relationships" xmlns:p="http://schemas.openxmlformats.org/presentationml/2006/main">
   <p:cSld>
@@ -7244,7 +6942,7 @@
                 </a:solidFill>
                 <a:latin typeface="Cambria"/>
               </a:rPr>
-              <a:t>Mode B — The Live Rhythm-Card Walk</a:t>
+              <a:t>Mode A — The Missed Evening Runs Whole</a:t>
             </a:r>
           </a:p>
         </p:txBody>
@@ -7257,8 +6955,8 @@
         </p:nvSpPr>
         <p:spPr>
           <a:xfrm>
-            <a:off x="822960" y="1554480"/>
-            <a:ext cx="10515600" cy="4892040"/>
+            <a:off x="822960" y="1600200"/>
+            <a:ext cx="5669280" cy="4572000"/>
           </a:xfrm>
           <a:prstGeom prst="rect">
             <a:avLst/>
@@ -7271,7 +6969,7 @@
           <a:p>
             <a:pPr marL="274320" indent="-274320">
               <a:spcAft>
-                <a:spcPts val="750"/>
+                <a:spcPts val="800"/>
               </a:spcAft>
             </a:pPr>
             <a:r>
@@ -7290,13 +6988,13 @@
                 </a:solidFill>
                 <a:latin typeface="Calibri"/>
               </a:rPr>
-              <a:t>If the quarter ran clean, the whole room walks its actual Rhythm Cards aloud — “the real ones, not the ideal ones”</a:t>
+              <a:t>If the quarter lost an evening — the snow, the assembly, the bug — tonight runs that session's plan, unchanged</a:t>
             </a:r>
           </a:p>
           <a:p>
             <a:pPr marL="274320" indent="-274320">
               <a:spcAft>
-                <a:spcPts val="750"/>
+                <a:spcPts val="800"/>
               </a:spcAft>
             </a:pPr>
             <a:r>
@@ -7315,13 +7013,13 @@
                 </a:solidFill>
                 <a:latin typeface="Calibri"/>
               </a:rPr>
-              <a:t>The leaders walk first — and walk genuinely slipped cards honestly; the whole evening stands on that</a:t>
+              <a:t>“Tonight is not a make-up class squeezed in. Tonight IS [session name] — whole, unhurried, the evening you were always going to get.”</a:t>
             </a:r>
           </a:p>
           <a:p>
             <a:pPr marL="274320" indent="-274320">
               <a:spcAft>
-                <a:spcPts val="750"/>
+                <a:spcPts val="800"/>
               </a:spcAft>
             </a:pPr>
             <a:r>
@@ -7340,13 +7038,13 @@
                 </a:solidFill>
                 <a:latin typeface="Calibri"/>
               </a:rPr>
-              <a:t>Two or three minutes each: daily, weekly, monthly, as lived — holds and slips in the same voice</a:t>
+              <a:t>“Nothing was skipped this year; it just moved.”</a:t>
             </a:r>
           </a:p>
           <a:p>
             <a:pPr marL="274320" indent="-274320">
               <a:spcAft>
-                <a:spcPts val="750"/>
+                <a:spcPts val="800"/>
               </a:spcAft>
             </a:pPr>
             <a:r>
@@ -7365,57 +7063,62 @@
                 </a:solidFill>
                 <a:latin typeface="Calibri"/>
               </a:rPr>
-              <a:t>Glad out loud about holds; never guilt about slips — “a slip you noticed is the practice working”</a:t>
-            </a:r>
-          </a:p>
-          <a:p>
-            <a:pPr marL="274320" indent="-274320">
+              <a:t>The lifted plan runs whole — its blocks, its scripts, its splits; only its closing yields to tonight's quarter-close constants</a:t>
+            </a:r>
+          </a:p>
+        </p:txBody>
+      </p:sp>
+      <p:sp>
+        <p:nvSpPr>
+          <p:cNvPr id="6" name="TextBox 6"/>
+          <p:cNvSpPr txBox="1"/>
+          <p:nvPr/>
+        </p:nvSpPr>
+        <p:spPr>
+          <a:xfrm>
+            <a:off x="6766560" y="1737360"/>
+            <a:ext cx="4663440" cy="2194560"/>
+          </a:xfrm>
+          <a:prstGeom prst="rect">
+            <a:avLst/>
+          </a:prstGeom>
+          <a:solidFill>
+            <a:srgbClr val="F1F6EC"/>
+          </a:solidFill>
+        </p:spPr>
+        <p:txBody>
+          <a:bodyPr wrap="square" lIns="91440" tIns="91440" rIns="91440" bIns="91440" anchor="ctr"/>
+          <a:lstStyle/>
+          <a:p>
+            <a:pPr>
               <a:spcAft>
-                <a:spcPts val="750"/>
+                <a:spcPts val="900"/>
               </a:spcAft>
             </a:pPr>
             <a:r>
-              <a:rPr sz="2200" b="1" i="0">
+              <a:rPr sz="1200" b="1" i="0">
                 <a:solidFill>
                   <a:srgbClr val="97BC62"/>
                 </a:solidFill>
                 <a:latin typeface="Calibri"/>
               </a:rPr>
-              <a:t>•  </a:t>
-            </a:r>
-            <a:r>
-              <a:rPr sz="2200" b="0" i="0">
-                <a:solidFill>
-                  <a:srgbClr val="222B22"/>
-                </a:solidFill>
-                <a:latin typeface="Calibri"/>
-              </a:rPr>
-              <a:t>“If you want help with a slip, ask for it, and we will spend a minute on it together. If you do not, name it and keep walking.”</a:t>
-            </a:r>
-          </a:p>
-          <a:p>
-            <a:pPr marL="274320" indent="-274320">
+              <a:t>PROVERBS 16:9 (ESV)</a:t>
+            </a:r>
+          </a:p>
+          <a:p>
+            <a:pPr>
               <a:spcAft>
-                <a:spcPts val="750"/>
+                <a:spcPts val="600"/>
               </a:spcAft>
             </a:pPr>
             <a:r>
-              <a:rPr sz="2200" b="1" i="0">
-                <a:solidFill>
-                  <a:srgbClr val="97BC62"/>
-                </a:solidFill>
-                <a:latin typeface="Calibri"/>
-              </a:rPr>
-              <a:t>•  </a:t>
-            </a:r>
-            <a:r>
-              <a:rPr sz="2200" b="0" i="0">
+              <a:rPr sz="2400" b="0" i="1">
                 <a:solidFill>
                   <a:srgbClr val="222B22"/>
                 </a:solidFill>
-                <a:latin typeface="Calibri"/>
-              </a:rPr>
-              <a:t>Everyone walks their own card — parents never their teen's; pass-anytime holds tonight like every night</a:t>
+                <a:latin typeface="Cambria"/>
+              </a:rPr>
+              <a:t>“The heart of man plans his way, but the LORD establishes his steps.”</a:t>
             </a:r>
           </a:p>
         </p:txBody>
@@ -7442,7 +7145,7 @@
           <a:p>
             <a:pPr algn="r"/>
             <a:r>
-              <a:t>212</a:t>
+              <a:t>211</a:t>
             </a:r>
             <a:endParaRPr sz="1000" b="1">
               <a:solidFill>
@@ -7541,7 +7244,7 @@
                 </a:solidFill>
                 <a:latin typeface="Cambria"/>
               </a:rPr>
-              <a:t>The Borrow Round</a:t>
+              <a:t>Mode B — The Live Rhythm-Card Walk</a:t>
             </a:r>
           </a:p>
         </p:txBody>
@@ -7568,11 +7271,11 @@
           <a:p>
             <a:pPr marL="274320" indent="-274320">
               <a:spcAft>
-                <a:spcPts val="900"/>
+                <a:spcPts val="750"/>
               </a:spcAft>
             </a:pPr>
             <a:r>
-              <a:rPr sz="2800" b="1" i="0">
+              <a:rPr sz="2200" b="1" i="0">
                 <a:solidFill>
                   <a:srgbClr val="97BC62"/>
                 </a:solidFill>
@@ -7581,23 +7284,23 @@
               <a:t>•  </a:t>
             </a:r>
             <a:r>
-              <a:rPr sz="2800" b="0" i="0">
+              <a:rPr sz="2200" b="0" i="0">
                 <a:solidFill>
                   <a:srgbClr val="222B22"/>
                 </a:solidFill>
                 <a:latin typeface="Calibri"/>
               </a:rPr>
-              <a:t>“Listen like a thief. If you hear an idea you want — a time of day, a trick, a place to keep the card — take it.”</a:t>
+              <a:t>If the quarter ran clean, the whole room walks its actual Rhythm Cards aloud — “the real ones, not the ideal ones”</a:t>
             </a:r>
           </a:p>
           <a:p>
             <a:pPr marL="274320" indent="-274320">
               <a:spcAft>
-                <a:spcPts val="900"/>
+                <a:spcPts val="750"/>
               </a:spcAft>
             </a:pPr>
             <a:r>
-              <a:rPr sz="2800" b="1" i="0">
+              <a:rPr sz="2200" b="1" i="0">
                 <a:solidFill>
                   <a:srgbClr val="97BC62"/>
                 </a:solidFill>
@@ -7606,23 +7309,23 @@
               <a:t>•  </a:t>
             </a:r>
             <a:r>
-              <a:rPr sz="2800" b="0" i="0">
+              <a:rPr sz="2200" b="0" i="0">
                 <a:solidFill>
                   <a:srgbClr val="222B22"/>
                 </a:solidFill>
                 <a:latin typeface="Calibri"/>
               </a:rPr>
-              <a:t>“That is not cheating. That is what a fellowship is for.”</a:t>
+              <a:t>The leaders walk first — and walk genuinely slipped cards honestly; the whole evening stands on that</a:t>
             </a:r>
           </a:p>
           <a:p>
             <a:pPr marL="274320" indent="-274320">
               <a:spcAft>
-                <a:spcPts val="900"/>
+                <a:spcPts val="750"/>
               </a:spcAft>
             </a:pPr>
             <a:r>
-              <a:rPr sz="2800" b="1" i="0">
+              <a:rPr sz="2200" b="1" i="0">
                 <a:solidFill>
                   <a:srgbClr val="97BC62"/>
                 </a:solidFill>
@@ -7631,23 +7334,23 @@
               <a:t>•  </a:t>
             </a:r>
             <a:r>
-              <a:rPr sz="2800" b="0" i="0">
+              <a:rPr sz="2200" b="0" i="0">
                 <a:solidFill>
                   <a:srgbClr val="222B22"/>
                 </a:solidFill>
                 <a:latin typeface="Calibri"/>
               </a:rPr>
-              <a:t>One sentence around the circle: one idea you heard tonight that you are stealing — name it, and the person you stole it from</a:t>
+              <a:t>Two or three minutes each: daily, weekly, monthly, as lived — holds and slips in the same voice</a:t>
             </a:r>
           </a:p>
           <a:p>
             <a:pPr marL="274320" indent="-274320">
               <a:spcAft>
-                <a:spcPts val="900"/>
+                <a:spcPts val="750"/>
               </a:spcAft>
             </a:pPr>
             <a:r>
-              <a:rPr sz="2800" b="1" i="0">
+              <a:rPr sz="2200" b="1" i="0">
                 <a:solidFill>
                   <a:srgbClr val="97BC62"/>
                 </a:solidFill>
@@ -7656,13 +7359,63 @@
               <a:t>•  </a:t>
             </a:r>
             <a:r>
-              <a:rPr sz="2800" b="0" i="0">
+              <a:rPr sz="2200" b="0" i="0">
                 <a:solidFill>
                   <a:srgbClr val="222B22"/>
                 </a:solidFill>
                 <a:latin typeface="Calibri"/>
               </a:rPr>
-              <a:t>Fast, light — pass-anytime</a:t>
+              <a:t>Glad out loud about holds; never guilt about slips — “a slip you noticed is the practice working”</a:t>
+            </a:r>
+          </a:p>
+          <a:p>
+            <a:pPr marL="274320" indent="-274320">
+              <a:spcAft>
+                <a:spcPts val="750"/>
+              </a:spcAft>
+            </a:pPr>
+            <a:r>
+              <a:rPr sz="2200" b="1" i="0">
+                <a:solidFill>
+                  <a:srgbClr val="97BC62"/>
+                </a:solidFill>
+                <a:latin typeface="Calibri"/>
+              </a:rPr>
+              <a:t>•  </a:t>
+            </a:r>
+            <a:r>
+              <a:rPr sz="2200" b="0" i="0">
+                <a:solidFill>
+                  <a:srgbClr val="222B22"/>
+                </a:solidFill>
+                <a:latin typeface="Calibri"/>
+              </a:rPr>
+              <a:t>“If you want help with a slip, ask for it, and we will spend a minute on it together. If you do not, name it and keep walking.”</a:t>
+            </a:r>
+          </a:p>
+          <a:p>
+            <a:pPr marL="274320" indent="-274320">
+              <a:spcAft>
+                <a:spcPts val="750"/>
+              </a:spcAft>
+            </a:pPr>
+            <a:r>
+              <a:rPr sz="2200" b="1" i="0">
+                <a:solidFill>
+                  <a:srgbClr val="97BC62"/>
+                </a:solidFill>
+                <a:latin typeface="Calibri"/>
+              </a:rPr>
+              <a:t>•  </a:t>
+            </a:r>
+            <a:r>
+              <a:rPr sz="2200" b="0" i="0">
+                <a:solidFill>
+                  <a:srgbClr val="222B22"/>
+                </a:solidFill>
+                <a:latin typeface="Calibri"/>
+              </a:rPr>
+              <a:t>Everyone walks their own card — parents never their teen's; pass-anytime holds tonight like every night</a:t>
             </a:r>
           </a:p>
         </p:txBody>
@@ -7689,7 +7442,7 @@
           <a:p>
             <a:pPr algn="r"/>
             <a:r>
-              <a:t>213</a:t>
+              <a:t>212</a:t>
             </a:r>
             <a:endParaRPr sz="1000" b="1">
               <a:solidFill>
@@ -7788,7 +7541,7 @@
                 </a:solidFill>
                 <a:latin typeface="Cambria"/>
               </a:rPr>
-              <a:t>Quarterly Pulse — Back in the Bin</a:t>
+              <a:t>The Borrow Round</a:t>
             </a:r>
           </a:p>
         </p:txBody>
@@ -7834,7 +7587,7 @@
                 </a:solidFill>
                 <a:latin typeface="Calibri"/>
               </a:rPr>
-              <a:t>The return bin sits by the door — drop your Pulse 3 page as you arrive</a:t>
+              <a:t>“Listen like a thief. If you hear an idea you want — a time of day, a trick, a place to keep the card — take it.”</a:t>
             </a:r>
           </a:p>
           <a:p>
@@ -7859,7 +7612,7 @@
                 </a:solidFill>
                 <a:latin typeface="Calibri"/>
               </a:rPr>
-              <a:t>Nobody watches the bin; nobody is asked whether they dropped a page</a:t>
+              <a:t>“That is not cheating. That is what a fellowship is for.”</a:t>
             </a:r>
           </a:p>
           <a:p>
@@ -7884,7 +7637,7 @@
                 </a:solidFill>
                 <a:latin typeface="Calibri"/>
               </a:rPr>
-              <a:t>Spares sit beside it for those who forgot — a page next week is as welcome as a page tonight</a:t>
+              <a:t>One sentence around the circle: one idea you heard tonight that you are stealing — name it, and the person you stole it from</a:t>
             </a:r>
           </a:p>
           <a:p>
@@ -7909,7 +7662,7 @@
                 </a:solidFill>
                 <a:latin typeface="Calibri"/>
               </a:rPr>
-              <a:t>The team reads every page — the Quarter 4 planning conversation starts from what these pages say</a:t>
+              <a:t>Fast, light — pass-anytime</a:t>
             </a:r>
           </a:p>
         </p:txBody>
@@ -7936,7 +7689,7 @@
           <a:p>
             <a:pPr algn="r"/>
             <a:r>
-              <a:t>214</a:t>
+              <a:t>213</a:t>
             </a:r>
             <a:endParaRPr sz="1000" b="1">
               <a:solidFill>
@@ -7956,6 +7709,253 @@
 </file>
 
 <file path=ppt/slides/slide8.xml><?xml version="1.0" encoding="utf-8"?>
+<p:sld xmlns:a="http://schemas.openxmlformats.org/drawingml/2006/main" xmlns:r="http://schemas.openxmlformats.org/officeDocument/2006/relationships" xmlns:p="http://schemas.openxmlformats.org/presentationml/2006/main">
+  <p:cSld>
+    <p:spTree>
+      <p:nvGrpSpPr>
+        <p:cNvPr id="1" name=""/>
+        <p:cNvGrpSpPr/>
+        <p:nvPr/>
+      </p:nvGrpSpPr>
+      <p:grpSpPr>
+        <a:xfrm>
+          <a:off x="0" y="0"/>
+          <a:ext cx="0" cy="0"/>
+          <a:chOff x="0" y="0"/>
+          <a:chExt cx="0" cy="0"/>
+        </a:xfrm>
+      </p:grpSpPr>
+      <p:sp>
+        <p:nvSpPr>
+          <p:cNvPr id="2" name="Rectangle 1"/>
+          <p:cNvSpPr/>
+          <p:nvPr/>
+        </p:nvSpPr>
+        <p:spPr>
+          <a:xfrm>
+            <a:off x="0" y="0"/>
+            <a:ext cx="12191695" cy="6858000"/>
+          </a:xfrm>
+          <a:prstGeom prst="rect">
+            <a:avLst/>
+          </a:prstGeom>
+          <a:solidFill>
+            <a:srgbClr val="FFFFFF"/>
+          </a:solidFill>
+          <a:ln>
+            <a:noFill/>
+          </a:ln>
+        </p:spPr>
+        <p:txBody>
+          <a:bodyPr/>
+          <a:lstStyle/>
+          <a:p>
+            <a:endParaRPr/>
+          </a:p>
+        </p:txBody>
+      </p:sp>
+      <p:sp>
+        <p:nvSpPr>
+          <p:cNvPr id="3" name="TextBox 2"/>
+          <p:cNvSpPr txBox="1"/>
+          <p:nvPr/>
+        </p:nvSpPr>
+        <p:spPr>
+          <a:xfrm>
+            <a:off x="822960" y="502920"/>
+            <a:ext cx="10515600" cy="822960"/>
+          </a:xfrm>
+          <a:prstGeom prst="rect">
+            <a:avLst/>
+          </a:prstGeom>
+          <a:noFill/>
+        </p:spPr>
+        <p:txBody>
+          <a:bodyPr wrap="square">
+            <a:spAutoFit/>
+          </a:bodyPr>
+          <a:lstStyle/>
+          <a:p>
+            <a:pPr algn="l">
+              <a:spcAft>
+                <a:spcPts val="600"/>
+              </a:spcAft>
+            </a:pPr>
+            <a:r>
+              <a:rPr sz="2800" b="1" i="0">
+                <a:solidFill>
+                  <a:srgbClr val="2C5F2D"/>
+                </a:solidFill>
+                <a:latin typeface="Cambria"/>
+              </a:rPr>
+              <a:t>Quarterly Pulse — Back in the Bin</a:t>
+            </a:r>
+          </a:p>
+        </p:txBody>
+      </p:sp>
+      <p:sp>
+        <p:nvSpPr>
+          <p:cNvPr id="4" name="TextBox 4"/>
+          <p:cNvSpPr txBox="1"/>
+          <p:nvPr/>
+        </p:nvSpPr>
+        <p:spPr>
+          <a:xfrm>
+            <a:off x="822960" y="1554480"/>
+            <a:ext cx="10515600" cy="4892040"/>
+          </a:xfrm>
+          <a:prstGeom prst="rect">
+            <a:avLst/>
+          </a:prstGeom>
+          <a:noFill/>
+        </p:spPr>
+        <p:txBody>
+          <a:bodyPr wrap="square" lIns="91440" tIns="91440" rIns="91440" bIns="91440"/>
+          <a:lstStyle/>
+          <a:p>
+            <a:pPr marL="274320" indent="-274320">
+              <a:spcAft>
+                <a:spcPts val="900"/>
+              </a:spcAft>
+            </a:pPr>
+            <a:r>
+              <a:rPr sz="2800" b="1" i="0">
+                <a:solidFill>
+                  <a:srgbClr val="97BC62"/>
+                </a:solidFill>
+                <a:latin typeface="Calibri"/>
+              </a:rPr>
+              <a:t>•  </a:t>
+            </a:r>
+            <a:r>
+              <a:rPr sz="2800" b="0" i="0">
+                <a:solidFill>
+                  <a:srgbClr val="222B22"/>
+                </a:solidFill>
+                <a:latin typeface="Calibri"/>
+              </a:rPr>
+              <a:t>The return bin sits by the door — drop your Pulse 3 page as you arrive</a:t>
+            </a:r>
+          </a:p>
+          <a:p>
+            <a:pPr marL="274320" indent="-274320">
+              <a:spcAft>
+                <a:spcPts val="900"/>
+              </a:spcAft>
+            </a:pPr>
+            <a:r>
+              <a:rPr sz="2800" b="1" i="0">
+                <a:solidFill>
+                  <a:srgbClr val="97BC62"/>
+                </a:solidFill>
+                <a:latin typeface="Calibri"/>
+              </a:rPr>
+              <a:t>•  </a:t>
+            </a:r>
+            <a:r>
+              <a:rPr sz="2800" b="0" i="0">
+                <a:solidFill>
+                  <a:srgbClr val="222B22"/>
+                </a:solidFill>
+                <a:latin typeface="Calibri"/>
+              </a:rPr>
+              <a:t>Nobody watches the bin; nobody is asked whether they dropped a page</a:t>
+            </a:r>
+          </a:p>
+          <a:p>
+            <a:pPr marL="274320" indent="-274320">
+              <a:spcAft>
+                <a:spcPts val="900"/>
+              </a:spcAft>
+            </a:pPr>
+            <a:r>
+              <a:rPr sz="2800" b="1" i="0">
+                <a:solidFill>
+                  <a:srgbClr val="97BC62"/>
+                </a:solidFill>
+                <a:latin typeface="Calibri"/>
+              </a:rPr>
+              <a:t>•  </a:t>
+            </a:r>
+            <a:r>
+              <a:rPr sz="2800" b="0" i="0">
+                <a:solidFill>
+                  <a:srgbClr val="222B22"/>
+                </a:solidFill>
+                <a:latin typeface="Calibri"/>
+              </a:rPr>
+              <a:t>Spares sit beside it for those who forgot — a page next week is as welcome as a page tonight</a:t>
+            </a:r>
+          </a:p>
+          <a:p>
+            <a:pPr marL="274320" indent="-274320">
+              <a:spcAft>
+                <a:spcPts val="900"/>
+              </a:spcAft>
+            </a:pPr>
+            <a:r>
+              <a:rPr sz="2800" b="1" i="0">
+                <a:solidFill>
+                  <a:srgbClr val="97BC62"/>
+                </a:solidFill>
+                <a:latin typeface="Calibri"/>
+              </a:rPr>
+              <a:t>•  </a:t>
+            </a:r>
+            <a:r>
+              <a:rPr sz="2800" b="0" i="0">
+                <a:solidFill>
+                  <a:srgbClr val="222B22"/>
+                </a:solidFill>
+                <a:latin typeface="Calibri"/>
+              </a:rPr>
+              <a:t>The team reads every page — the Quarter 4 planning conversation starts from what these pages say</a:t>
+            </a:r>
+          </a:p>
+        </p:txBody>
+      </p:sp>
+      <p:sp>
+        <p:nvSpPr>
+          <p:cNvPr id="90" name="SlideNum"/>
+          <p:cNvSpPr txBox="1"/>
+          <p:nvPr/>
+        </p:nvSpPr>
+        <p:spPr>
+          <a:xfrm>
+            <a:off x="11384280" y="6446520"/>
+            <a:ext cx="640080" cy="292608"/>
+          </a:xfrm>
+          <a:prstGeom prst="rect">
+            <a:avLst/>
+          </a:prstGeom>
+          <a:noFill/>
+        </p:spPr>
+        <p:txBody>
+          <a:bodyPr wrap="none" lIns="0" tIns="0" rIns="45720" bIns="0" anchor="ctr"/>
+          <a:lstStyle/>
+          <a:p>
+            <a:pPr algn="r"/>
+            <a:r>
+              <a:t>214</a:t>
+            </a:r>
+            <a:endParaRPr sz="1000" b="1">
+              <a:solidFill>
+                <a:srgbClr val="7A8A6E"/>
+              </a:solidFill>
+              <a:latin typeface="Calibri"/>
+            </a:endParaRPr>
+          </a:p>
+        </p:txBody>
+      </p:sp>
+    </p:spTree>
+  </p:cSld>
+  <p:clrMapOvr>
+    <a:masterClrMapping/>
+  </p:clrMapOvr>
+</p:sld>
+</file>
+
+<file path=ppt/slides/slide9.xml><?xml version="1.0" encoding="utf-8"?>
 <p:sld xmlns:a="http://schemas.openxmlformats.org/drawingml/2006/main" xmlns:r="http://schemas.openxmlformats.org/officeDocument/2006/relationships" xmlns:p="http://schemas.openxmlformats.org/presentationml/2006/main">
   <p:cSld>
     <p:spTree>

--- a/_implementation-notes/evening-series/FotH Evening Session 17 Slides DRAFT v1.pptx
+++ b/_implementation-notes/evening-series/FotH Evening Session 17 Slides DRAFT v1.pptx
@@ -6463,7 +6463,7 @@
           <p:nvPr/>
         </p:nvPicPr>
         <p:blipFill>
-          <a:blip r:embed="rId4"/>
+          <a:blip r:embed="rId5"/>
           <a:stretch>
             <a:fillRect/>
           </a:stretch>

--- a/_implementation-notes/evening-series/FotH Evening Session 17 Slides DRAFT v1.pptx
+++ b/_implementation-notes/evening-series/FotH Evening Session 17 Slides DRAFT v1.pptx
@@ -4905,7 +4905,7 @@
           <a:p>
             <a:pPr algn="r"/>
             <a:r>
-              <a:t>216</a:t>
+              <a:t>249</a:t>
             </a:r>
             <a:endParaRPr sz="1000" b="1">
               <a:solidFill>
@@ -5097,7 +5097,7 @@
           <a:p>
             <a:pPr algn="r"/>
             <a:r>
-              <a:t>216a</a:t>
+              <a:t>250</a:t>
             </a:r>
             <a:endParaRPr sz="1000" b="1">
               <a:solidFill>
@@ -5394,7 +5394,7 @@
           <a:p>
             <a:pPr algn="r"/>
             <a:r>
-              <a:t>217</a:t>
+              <a:t>251</a:t>
             </a:r>
             <a:endParaRPr sz="1000" b="1">
               <a:solidFill>
@@ -5839,7 +5839,7 @@
           <a:p>
             <a:pPr algn="r"/>
             <a:r>
-              <a:t>218</a:t>
+              <a:t>252</a:t>
             </a:r>
             <a:endParaRPr sz="1000" b="1">
               <a:solidFill>
@@ -6013,7 +6013,7 @@
           <a:p>
             <a:pPr algn="r"/>
             <a:r>
-              <a:t>219</a:t>
+              <a:t>253</a:t>
             </a:r>
             <a:endParaRPr sz="1000" b="1">
               <a:solidFill>
@@ -6226,7 +6226,7 @@
           <a:p>
             <a:pPr algn="r"/>
             <a:r>
-              <a:t>209</a:t>
+              <a:t>241</a:t>
             </a:r>
             <a:endParaRPr sz="1000" b="1">
               <a:solidFill>
@@ -6443,7 +6443,7 @@
           <a:p>
             <a:pPr algn="r"/>
             <a:r>
-              <a:t>209a</a:t>
+              <a:t>242</a:t>
             </a:r>
             <a:endParaRPr sz="1000" b="1">
               <a:solidFill>
@@ -6807,7 +6807,7 @@
           <a:p>
             <a:pPr algn="r"/>
             <a:r>
-              <a:t>210</a:t>
+              <a:t>243</a:t>
             </a:r>
             <a:endParaRPr sz="1000" b="1">
               <a:solidFill>
@@ -7145,7 +7145,7 @@
           <a:p>
             <a:pPr algn="r"/>
             <a:r>
-              <a:t>211</a:t>
+              <a:t>244</a:t>
             </a:r>
             <a:endParaRPr sz="1000" b="1">
               <a:solidFill>
@@ -7442,7 +7442,7 @@
           <a:p>
             <a:pPr algn="r"/>
             <a:r>
-              <a:t>212</a:t>
+              <a:t>245</a:t>
             </a:r>
             <a:endParaRPr sz="1000" b="1">
               <a:solidFill>
@@ -7689,7 +7689,7 @@
           <a:p>
             <a:pPr algn="r"/>
             <a:r>
-              <a:t>213</a:t>
+              <a:t>246</a:t>
             </a:r>
             <a:endParaRPr sz="1000" b="1">
               <a:solidFill>
@@ -7936,7 +7936,7 @@
           <a:p>
             <a:pPr algn="r"/>
             <a:r>
-              <a:t>214</a:t>
+              <a:t>247</a:t>
             </a:r>
             <a:endParaRPr sz="1000" b="1">
               <a:solidFill>
@@ -8233,7 +8233,7 @@
           <a:p>
             <a:pPr algn="r"/>
             <a:r>
-              <a:t>215</a:t>
+              <a:t>248</a:t>
             </a:r>
             <a:endParaRPr sz="1000" b="1">
               <a:solidFill>

--- a/_implementation-notes/evening-series/FotH Evening Session 17 Slides DRAFT v1.pptx
+++ b/_implementation-notes/evening-series/FotH Evening Session 17 Slides DRAFT v1.pptx
@@ -6463,7 +6463,7 @@
           <p:nvPr/>
         </p:nvPicPr>
         <p:blipFill>
-          <a:blip r:embed="rId5"/>
+          <a:blip r:embed="rId6"/>
           <a:stretch>
             <a:fillRect/>
           </a:stretch>

--- a/_implementation-notes/evening-series/FotH Evening Session 17 Slides DRAFT v1.pptx
+++ b/_implementation-notes/evening-series/FotH Evening Session 17 Slides DRAFT v1.pptx
@@ -1513,13 +1513,11 @@
           <a:lstStyle/>
           <a:p>
             <a:r>
-              <a:rPr lang="en-US" sz="1200"/>
               <a:t>Q4 · pre-session · DIVIDER</a:t>
             </a:r>
           </a:p>
           <a:p>
             <a:r>
-              <a:rPr lang="en-US" sz="1200"/>
               <a:t>On screen through dinner and as the circle forms. Greet at the door — the slide holds the room.</a:t>
             </a:r>
           </a:p>
@@ -5986,7 +5984,7 @@
                 </a:solidFill>
                 <a:latin typeface="Calibri"/>
               </a:rPr>
-              <a:t>Weeks 18–22  ·  Five Wednesdays · the mercy cards, The Long Walk, two commissionings</a:t>
+              <a:t>Sessions 18 · 20 · 21 · 22  —  four evenings, every other Tuesday · the mercy cards (rehearsed at the lab), The Long Walk, two commissionings</a:t>
             </a:r>
           </a:p>
         </p:txBody>

--- a/_implementation-notes/evening-series/FotH Evening Session 17 Slides DRAFT v1.pptx
+++ b/_implementation-notes/evening-series/FotH Evening Session 17 Slides DRAFT v1.pptx
@@ -1103,7 +1103,7 @@
           </a:p>
           <a:p>
             <a:r>
-              <a:t>BEATS: 1. Bless, then say the reframe once, warmly: we lost [date] to [cause]; this afternoon exists in the calendar for exactly this — today IS [session name], whole, not a make-up. Nothing was skipped; it just moved. 2. At 4:20 hand the room to the lifted plan — its blocks, scripts, splits, and watch-fors run from its own run sheet, prepped via the lift checklist at the prep meeting. 3. Today's constants resume at 5:13: the break practice, the feedback round, the close.</a:t>
+              <a:t>BEATS: 1. Bless, then say the reframe once, warmly: we lost [date] to [cause]; this afternoon exists in the calendar for exactly this — today IS [session name], whole, not a make-up. Nothing was skipped; it just moved. 2. At 7:27 hand the room to the lifted plan — its blocks, scripts, splits, and watch-fors run from its own run sheet, prepped via the lift checklist at the prep meeting. 3. Today's constants resume at 7:50: the break practice, the feedback round, the close.</a:t>
             </a:r>
           </a:p>
           <a:p>
@@ -1166,7 +1166,7 @@
           <a:p>
             <a:r>
               <a:rPr lang="en-US" sz="1200"/>
-              <a:t>BEATS: 1. Open: container, one word — we lost nothing this quarter; today we walk the real cards, not the ideal ones. 2. Proverbs 16:9, short: we planned the way; the LORD established the steps. 3. Leaders walk FIRST (4:28–4:38), genuinely slipped cards — the session stands on this; open with the slip. 4. The room walks (4:38–5:13): 2–3 min each, daily/weekly/monthly as lived; troubleshoot one minute only when invited; listen like a thief.</a:t>
+              <a:t>BEATS: 1. Open: container, one word — we lost nothing this quarter; today we walk the real cards, not the ideal ones. 2. Proverbs 16:9, short: we planned the way; the LORD established the steps. 3. Leaders walk FIRST (7:59–8:03), genuinely slipped cards — the session stands on this; open with the slip. 4. The room walks (8:03–8:18): 2–3 min each, daily/weekly/monthly as lived; troubleshoot one minute only when invited; listen like a thief.</a:t>
             </a:r>
           </a:p>
           <a:p>

--- a/_implementation-notes/evening-series/FotH Evening Session 17 Slides DRAFT v1.pptx
+++ b/_implementation-notes/evening-series/FotH Evening Session 17 Slides DRAFT v1.pptx
@@ -4903,7 +4903,7 @@
           <a:p>
             <a:pPr algn="r"/>
             <a:r>
-              <a:t>249</a:t>
+              <a:t>250</a:t>
             </a:r>
             <a:endParaRPr sz="1000" b="1">
               <a:solidFill>
@@ -5095,7 +5095,7 @@
           <a:p>
             <a:pPr algn="r"/>
             <a:r>
-              <a:t>250</a:t>
+              <a:t>251</a:t>
             </a:r>
             <a:endParaRPr sz="1000" b="1">
               <a:solidFill>
@@ -5392,7 +5392,7 @@
           <a:p>
             <a:pPr algn="r"/>
             <a:r>
-              <a:t>251</a:t>
+              <a:t>252</a:t>
             </a:r>
             <a:endParaRPr sz="1000" b="1">
               <a:solidFill>
@@ -5837,7 +5837,7 @@
           <a:p>
             <a:pPr algn="r"/>
             <a:r>
-              <a:t>252</a:t>
+              <a:t>253</a:t>
             </a:r>
             <a:endParaRPr sz="1000" b="1">
               <a:solidFill>
@@ -6011,7 +6011,7 @@
           <a:p>
             <a:pPr algn="r"/>
             <a:r>
-              <a:t>253</a:t>
+              <a:t>254</a:t>
             </a:r>
             <a:endParaRPr sz="1000" b="1">
               <a:solidFill>
@@ -6224,7 +6224,7 @@
           <a:p>
             <a:pPr algn="r"/>
             <a:r>
-              <a:t>241</a:t>
+              <a:t>242</a:t>
             </a:r>
             <a:endParaRPr sz="1000" b="1">
               <a:solidFill>
@@ -6441,7 +6441,7 @@
           <a:p>
             <a:pPr algn="r"/>
             <a:r>
-              <a:t>242</a:t>
+              <a:t>243</a:t>
             </a:r>
             <a:endParaRPr sz="1000" b="1">
               <a:solidFill>
@@ -6805,7 +6805,7 @@
           <a:p>
             <a:pPr algn="r"/>
             <a:r>
-              <a:t>243</a:t>
+              <a:t>244</a:t>
             </a:r>
             <a:endParaRPr sz="1000" b="1">
               <a:solidFill>
@@ -7143,7 +7143,7 @@
           <a:p>
             <a:pPr algn="r"/>
             <a:r>
-              <a:t>244</a:t>
+              <a:t>245</a:t>
             </a:r>
             <a:endParaRPr sz="1000" b="1">
               <a:solidFill>
@@ -7440,7 +7440,7 @@
           <a:p>
             <a:pPr algn="r"/>
             <a:r>
-              <a:t>245</a:t>
+              <a:t>246</a:t>
             </a:r>
             <a:endParaRPr sz="1000" b="1">
               <a:solidFill>
@@ -7687,7 +7687,7 @@
           <a:p>
             <a:pPr algn="r"/>
             <a:r>
-              <a:t>246</a:t>
+              <a:t>247</a:t>
             </a:r>
             <a:endParaRPr sz="1000" b="1">
               <a:solidFill>
@@ -7934,7 +7934,7 @@
           <a:p>
             <a:pPr algn="r"/>
             <a:r>
-              <a:t>247</a:t>
+              <a:t>248</a:t>
             </a:r>
             <a:endParaRPr sz="1000" b="1">
               <a:solidFill>
@@ -8231,7 +8231,7 @@
           <a:p>
             <a:pPr algn="r"/>
             <a:r>
-              <a:t>248</a:t>
+              <a:t>249</a:t>
             </a:r>
             <a:endParaRPr sz="1000" b="1">
               <a:solidFill>

--- a/_implementation-notes/evening-series/FotH Evening Session 17 Slides DRAFT v1.pptx
+++ b/_implementation-notes/evening-series/FotH Evening Session 17 Slides DRAFT v1.pptx
@@ -1454,20 +1454,22 @@
           <a:lstStyle/>
           <a:p>
             <a:r>
-              <a:rPr lang="en-US" sz="1200"/>
               <a:t>S17 · closing, timed at the lab (B / A) · EITHER MODE</a:t>
             </a:r>
           </a:p>
           <a:p>
             <a:r>
-              <a:rPr lang="en-US" sz="1200"/>
               <a:t>BEATS: 1. Standing circle, one word each. 2. Name the quarter closed: three walked, one to go — consolidation and the two commissionings; dates come in the break communication. 3. The send: one practice on purpose, everything else rests; if even the one goes down, begin again on the next available day. The Return II asks the kind question first: what held? 4. Aaronic blessing. Go rest — see you on the other side.</a:t>
             </a:r>
           </a:p>
           <a:p>
             <a:r>
-              <a:rPr lang="en-US" sz="1200"/>
               <a:t>CUES: Every family leaves knowing which Companion is reachable over the break, and how.</a:t>
+            </a:r>
+          </a:p>
+          <a:p>
+            <a:r>
+              <a:t>BLESSINGS: eyes on the person, not the screen — nothing to read; say what is on your heart for them, specific and short.</a:t>
             </a:r>
           </a:p>
         </p:txBody>
@@ -5698,7 +5700,7 @@
                 </a:solidFill>
                 <a:latin typeface="Calibri"/>
               </a:rPr>
-              <a:t>Blessings — specific, witnessed, short</a:t>
+              <a:t>Blessings — eyes on the person, not the screen: say what is on your heart for them. Specific, witnessed, short</a:t>
             </a:r>
           </a:p>
           <a:p>

--- a/_implementation-notes/evening-series/FotH Evening Session 17 Slides DRAFT v1.pptx
+++ b/_implementation-notes/evening-series/FotH Evening Session 17 Slides DRAFT v1.pptx
@@ -4905,7 +4905,7 @@
           <a:p>
             <a:pPr algn="r"/>
             <a:r>
-              <a:t>250</a:t>
+              <a:t>251</a:t>
             </a:r>
             <a:endParaRPr sz="1000" b="1">
               <a:solidFill>
@@ -5097,7 +5097,7 @@
           <a:p>
             <a:pPr algn="r"/>
             <a:r>
-              <a:t>251</a:t>
+              <a:t>252</a:t>
             </a:r>
             <a:endParaRPr sz="1000" b="1">
               <a:solidFill>
@@ -5394,7 +5394,7 @@
           <a:p>
             <a:pPr algn="r"/>
             <a:r>
-              <a:t>252</a:t>
+              <a:t>253</a:t>
             </a:r>
             <a:endParaRPr sz="1000" b="1">
               <a:solidFill>
@@ -5839,7 +5839,7 @@
           <a:p>
             <a:pPr algn="r"/>
             <a:r>
-              <a:t>253</a:t>
+              <a:t>254</a:t>
             </a:r>
             <a:endParaRPr sz="1000" b="1">
               <a:solidFill>
@@ -6013,7 +6013,7 @@
           <a:p>
             <a:pPr algn="r"/>
             <a:r>
-              <a:t>254</a:t>
+              <a:t>255</a:t>
             </a:r>
             <a:endParaRPr sz="1000" b="1">
               <a:solidFill>
@@ -6226,7 +6226,7 @@
           <a:p>
             <a:pPr algn="r"/>
             <a:r>
-              <a:t>242</a:t>
+              <a:t>243</a:t>
             </a:r>
             <a:endParaRPr sz="1000" b="1">
               <a:solidFill>
@@ -6443,7 +6443,7 @@
           <a:p>
             <a:pPr algn="r"/>
             <a:r>
-              <a:t>243</a:t>
+              <a:t>244</a:t>
             </a:r>
             <a:endParaRPr sz="1000" b="1">
               <a:solidFill>
@@ -6807,7 +6807,7 @@
           <a:p>
             <a:pPr algn="r"/>
             <a:r>
-              <a:t>244</a:t>
+              <a:t>245</a:t>
             </a:r>
             <a:endParaRPr sz="1000" b="1">
               <a:solidFill>
@@ -7145,7 +7145,7 @@
           <a:p>
             <a:pPr algn="r"/>
             <a:r>
-              <a:t>245</a:t>
+              <a:t>246</a:t>
             </a:r>
             <a:endParaRPr sz="1000" b="1">
               <a:solidFill>
@@ -7442,7 +7442,7 @@
           <a:p>
             <a:pPr algn="r"/>
             <a:r>
-              <a:t>246</a:t>
+              <a:t>247</a:t>
             </a:r>
             <a:endParaRPr sz="1000" b="1">
               <a:solidFill>
@@ -7689,7 +7689,7 @@
           <a:p>
             <a:pPr algn="r"/>
             <a:r>
-              <a:t>247</a:t>
+              <a:t>248</a:t>
             </a:r>
             <a:endParaRPr sz="1000" b="1">
               <a:solidFill>
@@ -7936,7 +7936,7 @@
           <a:p>
             <a:pPr algn="r"/>
             <a:r>
-              <a:t>248</a:t>
+              <a:t>249</a:t>
             </a:r>
             <a:endParaRPr sz="1000" b="1">
               <a:solidFill>
@@ -8233,7 +8233,7 @@
           <a:p>
             <a:pPr algn="r"/>
             <a:r>
-              <a:t>249</a:t>
+              <a:t>250</a:t>
             </a:r>
             <a:endParaRPr sz="1000" b="1">
               <a:solidFill>

--- a/_implementation-notes/evening-series/FotH Evening Session 17 Slides DRAFT v1.pptx
+++ b/_implementation-notes/evening-series/FotH Evening Session 17 Slides DRAFT v1.pptx
@@ -784,7 +784,7 @@
           <a:lstStyle/>
           <a:p>
             <a:r>
-              <a:t>S17 · WELCOME · LEAD: CONTAINER HOLDER · GROUNDING — every session opens on this map</a:t>
+              <a:t>E13 · WELCOME · LEAD: CONTAINER HOLDER · GROUNDING — every session opens on this map</a:t>
             </a:r>
           </a:p>
           <a:p>
@@ -794,7 +794,7 @@
           </a:p>
           <a:p>
             <a:r>
-              <a:t>1. Locate tonight on the map, plainly: Session 17 holds the whole map — all four Connects, wherever the year needs them tonight. Each connection makes the next one real (Matt. 22:37–40).</a:t>
+              <a:t>1. Locate tonight on the map, plainly: Evening 13 holds the whole map — all four Connects, wherever the year needs them tonight. Each connection makes the next one real (Matt. 22:37–40).</a:t>
             </a:r>
           </a:p>
           <a:p>
@@ -855,7 +855,7 @@
           <a:lstStyle/>
           <a:p>
             <a:r>
-              <a:t>S17 · COMMISSIONING · LEAD: CONTENT PRESENTER</a:t>
+              <a:t>E13 · COMMISSIONING · LEAD: CONTENT PRESENTER</a:t>
             </a:r>
           </a:p>
           <a:p>
@@ -926,7 +926,7 @@
           <a:lstStyle/>
           <a:p>
             <a:r>
-              <a:t>S17 · COMMISSIONING · LEAD: CONTENT PRESENTER</a:t>
+              <a:t>E13 · COMMISSIONING · LEAD: CONTENT PRESENTER</a:t>
             </a:r>
           </a:p>
           <a:p>
@@ -992,13 +992,11 @@
           <a:lstStyle/>
           <a:p>
             <a:r>
-              <a:rPr lang="en-US" sz="1200"/>
-              <a:t>S17 · pre-session · DIVIDER</a:t>
-            </a:r>
-          </a:p>
-          <a:p>
-            <a:r>
-              <a:rPr lang="en-US" sz="1200"/>
+              <a:t>E13 · pre-session · DIVIDER</a:t>
+            </a:r>
+          </a:p>
+          <a:p>
+            <a:r>
               <a:t>On screen through dinner and as the circle forms. Greet at the door — the slide holds the room.</a:t>
             </a:r>
           </a:p>
@@ -1045,13 +1043,11 @@
           <a:lstStyle/>
           <a:p>
             <a:r>
-              <a:rPr lang="en-US" sz="1200"/>
-              <a:t>S17 · 7:00–8:30 · LEAD: BOTH LEADERS · DUAL MODE — confirm A or B before the night</a:t>
-            </a:r>
-          </a:p>
-          <a:p>
-            <a:r>
-              <a:rPr lang="en-US" sz="1200"/>
+              <a:t>E13 · 7:00–8:30 · LEAD: BOTH LEADERS · DUAL MODE — confirm A or B before the night</a:t>
+            </a:r>
+          </a:p>
+          <a:p>
+            <a:r>
               <a:t>BEATS: 1. Today is the Float, the quarter's shock absorber, and it runs ONE of two modes, decided by what the quarter needs: an evening was lost (snow, assembly, illness) = Mode A, that session runs whole; the quarter ran clean = Mode B, the room walks its Rhythm Cards together. 2. The call was made at the team prep meeting, 48 hours out — never game-day — and families were told by the weekend before. Confirm with the team which mode was called, and prepare from that mode's plan. 3. Either mode: the Pulse bin sits at the door, one break practice is commissioned, and the feedback round and blessing close the quarter.</a:t>
             </a:r>
           </a:p>
@@ -1098,7 +1094,7 @@
           <a:lstStyle/>
           <a:p>
             <a:r>
-              <a:t>S17 · 7:00–8:30 · LEAD: BOTH LEADERS · MODE A — THE LIFTED SESSION</a:t>
+              <a:t>E13 · 7:00–8:30 · LEAD: BOTH LEADERS · MODE A — THE LIFTED SESSION</a:t>
             </a:r>
           </a:p>
           <a:p>
@@ -1159,25 +1155,21 @@
           <a:lstStyle/>
           <a:p>
             <a:r>
-              <a:rPr lang="en-US" sz="1200"/>
-              <a:t>S17 · 7:00–8:30 · LEAD: BOTH LEADERS · MODE B — THE RHYTHM WALK</a:t>
-            </a:r>
-          </a:p>
-          <a:p>
-            <a:r>
-              <a:rPr lang="en-US" sz="1200"/>
+              <a:t>E13 · 7:00–8:30 · LEAD: BOTH LEADERS · MODE B — THE RHYTHM WALK</a:t>
+            </a:r>
+          </a:p>
+          <a:p>
+            <a:r>
               <a:t>BEATS: 1. Open: container, one word — we lost nothing this quarter; today we walk the real cards, not the ideal ones. 2. Proverbs 16:9, short: we planned the way; the LORD established the steps. 3. Leaders walk FIRST (7:59–8:03), genuinely slipped cards — the session stands on this; open with the slip. 4. The room walks (8:03–8:18): 2–3 min each, daily/weekly/monthly as lived; troubleshoot one minute only when invited; listen like a thief.</a:t>
             </a:r>
           </a:p>
           <a:p>
             <a:r>
-              <a:rPr lang="en-US" sz="1200"/>
               <a:t>CUES: The arranged parent opens the room's round (Run Card) — never cold-call a teen; pass anytime.</a:t>
             </a:r>
           </a:p>
           <a:p>
             <a:r>
-              <a:rPr lang="en-US" sz="1200"/>
               <a:t>GUARD: A noticed slip is the practice working — quote the Returning Rule from the front. Parents walk their OWN card, never their teen's. Perfect cards and eyes-down passes get a warm word after, not a spotlight. A slip that is really a household in trouble: bless it, don't troubleshoot, follow up in 48 hours.</a:t>
             </a:r>
           </a:p>
@@ -1224,19 +1216,16 @@
           <a:lstStyle/>
           <a:p>
             <a:r>
-              <a:rPr lang="en-US" sz="1200"/>
-              <a:t>S17 · 8:18–8:20 · LEAD: CONTENT PRESENTER · MODE B, SHARED CIRCLE</a:t>
-            </a:r>
-          </a:p>
-          <a:p>
-            <a:r>
-              <a:rPr lang="en-US" sz="1200"/>
+              <a:t>E13 · 8:18–8:20 · LEAD: CONTENT PRESENTER · MODE B, SHARED CIRCLE</a:t>
+            </a:r>
+          </a:p>
+          <a:p>
+            <a:r>
               <a:t>BEATS: 1. Fast and light: one sentence each — one idea you heard today that you are stealing, and who you stole it from. 2. Stealing is the point — that is what a fellowship is for. 3. Then move straight into the break-practice commissioning; it shares this window.</a:t>
             </a:r>
           </a:p>
           <a:p>
             <a:r>
-              <a:rPr lang="en-US" sz="1200"/>
               <a:t>CUES: Pass anytime; keep the round quick — the commissioning needs its minutes.</a:t>
             </a:r>
           </a:p>
@@ -1283,19 +1272,16 @@
           <a:lstStyle/>
           <a:p>
             <a:r>
-              <a:rPr lang="en-US" sz="1200"/>
-              <a:t>S17 · 6:00–7:00 arrival · EITHER MODE</a:t>
-            </a:r>
-          </a:p>
-          <a:p>
-            <a:r>
-              <a:rPr lang="en-US" sz="1200"/>
+              <a:t>E13 · 6:00–7:00 arrival · EITHER MODE</a:t>
+            </a:r>
+          </a:p>
+          <a:p>
+            <a:r>
               <a:t>BEATS: 1. The return bin sits by the door, labeled, spare Pulse pages beside it. 2. Pages drop in as families arrive — greeted, never checked. 3. Nobody watches the bin; nobody is asked whether they dropped a page; a page next week is as welcome as a page today.</a:t>
             </a:r>
           </a:p>
           <a:p>
             <a:r>
-              <a:rPr lang="en-US" sz="1200"/>
               <a:t>GUARD: The bin is never a checkpoint. The team collects and reads every page this week — Quarter 4 is planned from them, and that promise is kept visibly.</a:t>
             </a:r>
           </a:p>
@@ -1342,19 +1328,16 @@
           <a:lstStyle/>
           <a:p>
             <a:r>
-              <a:rPr lang="en-US" sz="1200"/>
-              <a:t>S17 · late session, timed at the lab (Mode B / Mode A) · EITHER MODE</a:t>
-            </a:r>
-          </a:p>
-          <a:p>
-            <a:r>
-              <a:rPr lang="en-US" sz="1200"/>
+              <a:t>E13 · late session, timed at the lab (Mode B / Mode A) · EITHER MODE</a:t>
+            </a:r>
+          </a:p>
+          <a:p>
+            <a:r>
               <a:t>BEATS: 1. Name the precedent: this same move carried the cohort across Christmas, and it worked. 2. Choose ONE practice from your card — just one — carried deliberately through the break; the rest of the card is allowed to rest. Sabbath, not failure. 3. Write it in the journal NOW — the practice, when, where; give the room the full quiet minute. 4. One sentence around the circle: the practice you are carrying — speaking it is part of carrying it. 5. The Return II opens with the kind question: what held?</a:t>
             </a:r>
           </a:p>
           <a:p>
             <a:r>
-              <a:rPr lang="en-US" sz="1200"/>
               <a:t>GUARD: Never minimize the break from the front — 'see you in a couple weeks' is how practices die. The Returning Rule travels: begin again on the next available day.</a:t>
             </a:r>
           </a:p>
@@ -1401,13 +1384,11 @@
           <a:lstStyle/>
           <a:p>
             <a:r>
-              <a:rPr lang="en-US" sz="1200"/>
-              <a:t>S17 · late session, timed at the lab (B / A) · EITHER MODE</a:t>
-            </a:r>
-          </a:p>
-          <a:p>
-            <a:r>
-              <a:rPr lang="en-US" sz="1200"/>
+              <a:t>E13 · late session, timed at the lab (B / A) · EITHER MODE</a:t>
+            </a:r>
+          </a:p>
+          <a:p>
+            <a:r>
               <a:t>BEATS: 1. The session's leader answers the three first — in Mode A that is the lifted session's leader, per its plan. 2. Then the room, same two questions — two or three voices each. 3. Receive without defending — 'thank you' is the whole response.</a:t>
             </a:r>
           </a:p>
@@ -1454,7 +1435,7 @@
           <a:lstStyle/>
           <a:p>
             <a:r>
-              <a:t>S17 · closing, timed at the lab (B / A) · EITHER MODE</a:t>
+              <a:t>E13 · closing, timed at the lab (B / A) · EITHER MODE</a:t>
             </a:r>
           </a:p>
           <a:p>
@@ -5986,7 +5967,7 @@
                 </a:solidFill>
                 <a:latin typeface="Calibri"/>
               </a:rPr>
-              <a:t>Sessions 18 · 20 · 21 · 22  —  four evenings, every other Tuesday · the mercy cards (rehearsed at the lab), The Long Walk, two commissionings</a:t>
+              <a:t>Evenings 14 · 15 · 16 · 17  —  four evenings, every other Tuesday · the mercy cards (rehearsed at the lab), The Long Walk, two commissionings</a:t>
             </a:r>
           </a:p>
         </p:txBody>
@@ -6128,7 +6109,7 @@
                 </a:solidFill>
                 <a:latin typeface="Calibri"/>
               </a:rPr>
-              <a:t>SESSION 17</a:t>
+              <a:t>EVENING 13</a:t>
             </a:r>
           </a:p>
           <a:p>
@@ -6398,7 +6379,7 @@
                 </a:solidFill>
                 <a:latin typeface="Calibri"/>
               </a:rPr>
-              <a:t>Session 17 holds the whole map — </a:t>
+              <a:t>Evening 13 holds the whole map — </a:t>
             </a:r>
             <a:r>
               <a:rPr sz="1800" b="1">
@@ -6582,7 +6563,7 @@
                 </a:solidFill>
                 <a:latin typeface="Cambria"/>
               </a:rPr>
-              <a:t>Session 17 — Tonight’s Road</a:t>
+              <a:t>Evening 13 — Tonight’s Road</a:t>
             </a:r>
           </a:p>
         </p:txBody>

--- a/_implementation-notes/evening-series/FotH Evening Session 17 Slides DRAFT v1.pptx
+++ b/_implementation-notes/evening-series/FotH Evening Session 17 Slides DRAFT v1.pptx
@@ -1333,7 +1333,7 @@
           </a:p>
           <a:p>
             <a:r>
-              <a:t>BEATS: 1. Name the precedent: this same move carried the cohort across Christmas, and it worked. 2. Choose ONE practice from your card — just one — carried deliberately through the break; the rest of the card is allowed to rest. Sabbath, not failure. 3. Write it in the journal NOW — the practice, when, where; give the room the full quiet minute. 4. One sentence around the circle: the practice you are carrying — speaking it is part of carrying it. 5. The Return II opens with the kind question: what held?</a:t>
+              <a:t>BEATS: 1. Name the move: one practice, carried on purpose across the gap; the rest of the card rests. If no holiday break falls before this evening, the break is simply the two weeks since we last met; the evening form runs this test at every return. 2. Choose ONE practice from your card — just one — carried deliberately through the break; the rest of the card is allowed to rest. Sabbath, not failure. 3. Write it in the journal NOW — the practice, when, where; give the room the full quiet minute. 4. One sentence around the circle: the practice you are carrying — speaking it is part of carrying it. 5. The Return II opens with the kind question: what held?</a:t>
             </a:r>
           </a:p>
           <a:p>
@@ -5967,7 +5967,7 @@
                 </a:solidFill>
                 <a:latin typeface="Calibri"/>
               </a:rPr>
-              <a:t>Evenings 14 · 15 · 16 · 17  —  four evenings, every other Tuesday · the mercy cards (rehearsed at the lab), The Long Walk, two commissionings</a:t>
+              <a:t>Evenings 14 · 15 · 16 · 17  —  four evenings, every two weeks · the mercy cards (rehearsed at the lab), The Long Walk, two commissionings</a:t>
             </a:r>
           </a:p>
         </p:txBody>
@@ -8062,7 +8062,7 @@
                 </a:solidFill>
                 <a:latin typeface="Calibri"/>
               </a:rPr>
-              <a:t>The break starts tomorrow — and we have done this before: at Christmas, every one of us carried one practice across the gap, and at The Return we heard what held</a:t>
+              <a:t>The break starts now — one practice, carried on purpose across the gap; at The Return II we will hear what held</a:t>
             </a:r>
           </a:p>
           <a:p>
